--- a/02_QC.pptx
+++ b/02_QC.pptx
@@ -4,6 +4,9 @@
   <p:sldMasterIdLst>
     <p:sldMasterId id="2147483648" r:id="rId1"/>
   </p:sldMasterIdLst>
+  <p:notesMasterIdLst>
+    <p:notesMasterId r:id="rId14"/>
+  </p:notesMasterIdLst>
   <p:sldIdLst>
     <p:sldId id="256" r:id="rId2"/>
     <p:sldId id="257" r:id="rId3"/>
@@ -137,7 +140,7 @@
 <file path=ppt/revisionInfo.xml><?xml version="1.0" encoding="utf-8"?>
 <p1510:revInfo xmlns:a="http://schemas.openxmlformats.org/drawingml/2006/main" xmlns:r="http://schemas.openxmlformats.org/officeDocument/2006/relationships" xmlns:p1510="http://schemas.microsoft.com/office/powerpoint/2015/10/main">
   <p1510:revLst>
-    <p1510:client id="{99D31145-4B27-4251-A7E0-BED1DF947019}" v="5" dt="2026-04-05T06:46:20.655"/>
+    <p1510:client id="{4E536E97-3A46-445E-9633-E3479B8E730A}" v="1" dt="2026-04-30T19:13:02.054"/>
   </p1510:revLst>
 </p1510:revInfo>
 </file>
@@ -187,18 +190,1692 @@
             <ac:picMk id="1026" creationId="{4D24AC17-CDC0-D8ED-FDA7-C1591D8CD264}"/>
           </ac:picMkLst>
         </pc:picChg>
-        <pc:picChg chg="add del mod">
-          <ac:chgData name="Yassine Kasmi" userId="fdf8079a848cfec2" providerId="LiveId" clId="{A110CD56-9457-4CDC-B8D7-AAF74BDF5181}" dt="2026-04-05T06:46:20.655" v="8" actId="478"/>
-          <ac:picMkLst>
-            <pc:docMk/>
-            <pc:sldMk cId="2501229363" sldId="267"/>
-            <ac:picMk id="1028" creationId="{D68F59BC-5FA3-0E88-3E6A-464D35CA96C9}"/>
-          </ac:picMkLst>
-        </pc:picChg>
       </pc:sldChg>
     </pc:docChg>
   </pc:docChgLst>
 </pc:chgInfo>
+</file>
+
+<file path=ppt/notesMasters/notesMaster1.xml><?xml version="1.0" encoding="utf-8"?>
+<p:notesMaster xmlns:a="http://schemas.openxmlformats.org/drawingml/2006/main" xmlns:r="http://schemas.openxmlformats.org/officeDocument/2006/relationships" xmlns:p="http://schemas.openxmlformats.org/presentationml/2006/main">
+  <p:cSld>
+    <p:bg>
+      <p:bgRef idx="1001">
+        <a:schemeClr val="bg1"/>
+      </p:bgRef>
+    </p:bg>
+    <p:spTree>
+      <p:nvGrpSpPr>
+        <p:cNvPr id="1" name=""/>
+        <p:cNvGrpSpPr/>
+        <p:nvPr/>
+      </p:nvGrpSpPr>
+      <p:grpSpPr>
+        <a:xfrm>
+          <a:off x="0" y="0"/>
+          <a:ext cx="0" cy="0"/>
+          <a:chOff x="0" y="0"/>
+          <a:chExt cx="0" cy="0"/>
+        </a:xfrm>
+      </p:grpSpPr>
+      <p:sp>
+        <p:nvSpPr>
+          <p:cNvPr id="2" name="Header Placeholder 1"/>
+          <p:cNvSpPr>
+            <a:spLocks noGrp="1"/>
+          </p:cNvSpPr>
+          <p:nvPr>
+            <p:ph type="hdr" sz="quarter"/>
+          </p:nvPr>
+        </p:nvSpPr>
+        <p:spPr>
+          <a:xfrm>
+            <a:off x="0" y="0"/>
+            <a:ext cx="2971800" cy="458788"/>
+          </a:xfrm>
+          <a:prstGeom prst="rect">
+            <a:avLst/>
+          </a:prstGeom>
+        </p:spPr>
+        <p:txBody>
+          <a:bodyPr vert="horz" lIns="91440" tIns="45720" rIns="91440" bIns="45720" rtlCol="0"/>
+          <a:lstStyle>
+            <a:lvl1pPr algn="l">
+              <a:defRPr sz="1200"/>
+            </a:lvl1pPr>
+          </a:lstStyle>
+          <a:p>
+            <a:endParaRPr lang="en-GB"/>
+          </a:p>
+        </p:txBody>
+      </p:sp>
+      <p:sp>
+        <p:nvSpPr>
+          <p:cNvPr id="3" name="Date Placeholder 2"/>
+          <p:cNvSpPr>
+            <a:spLocks noGrp="1"/>
+          </p:cNvSpPr>
+          <p:nvPr>
+            <p:ph type="dt" idx="1"/>
+          </p:nvPr>
+        </p:nvSpPr>
+        <p:spPr>
+          <a:xfrm>
+            <a:off x="3884613" y="0"/>
+            <a:ext cx="2971800" cy="458788"/>
+          </a:xfrm>
+          <a:prstGeom prst="rect">
+            <a:avLst/>
+          </a:prstGeom>
+        </p:spPr>
+        <p:txBody>
+          <a:bodyPr vert="horz" lIns="91440" tIns="45720" rIns="91440" bIns="45720" rtlCol="0"/>
+          <a:lstStyle>
+            <a:lvl1pPr algn="r">
+              <a:defRPr sz="1200"/>
+            </a:lvl1pPr>
+          </a:lstStyle>
+          <a:p>
+            <a:fld id="{938B22D5-4AEB-445F-9CE7-2E8954DA05E1}" type="datetimeFigureOut">
+              <a:rPr lang="en-GB" smtClean="0"/>
+              <a:t>30/04/2026</a:t>
+            </a:fld>
+            <a:endParaRPr lang="en-GB"/>
+          </a:p>
+        </p:txBody>
+      </p:sp>
+      <p:sp>
+        <p:nvSpPr>
+          <p:cNvPr id="4" name="Slide Image Placeholder 3"/>
+          <p:cNvSpPr>
+            <a:spLocks noGrp="1" noRot="1" noChangeAspect="1"/>
+          </p:cNvSpPr>
+          <p:nvPr>
+            <p:ph type="sldImg" idx="2"/>
+          </p:nvPr>
+        </p:nvSpPr>
+        <p:spPr>
+          <a:xfrm>
+            <a:off x="685800" y="1143000"/>
+            <a:ext cx="5486400" cy="3086100"/>
+          </a:xfrm>
+          <a:prstGeom prst="rect">
+            <a:avLst/>
+          </a:prstGeom>
+          <a:noFill/>
+          <a:ln w="12700">
+            <a:solidFill>
+              <a:prstClr val="black"/>
+            </a:solidFill>
+          </a:ln>
+        </p:spPr>
+        <p:txBody>
+          <a:bodyPr vert="horz" lIns="91440" tIns="45720" rIns="91440" bIns="45720" rtlCol="0" anchor="ctr"/>
+          <a:lstStyle/>
+          <a:p>
+            <a:endParaRPr lang="en-GB"/>
+          </a:p>
+        </p:txBody>
+      </p:sp>
+      <p:sp>
+        <p:nvSpPr>
+          <p:cNvPr id="5" name="Notes Placeholder 4"/>
+          <p:cNvSpPr>
+            <a:spLocks noGrp="1"/>
+          </p:cNvSpPr>
+          <p:nvPr>
+            <p:ph type="body" sz="quarter" idx="3"/>
+          </p:nvPr>
+        </p:nvSpPr>
+        <p:spPr>
+          <a:xfrm>
+            <a:off x="685800" y="4400550"/>
+            <a:ext cx="5486400" cy="3600450"/>
+          </a:xfrm>
+          <a:prstGeom prst="rect">
+            <a:avLst/>
+          </a:prstGeom>
+        </p:spPr>
+        <p:txBody>
+          <a:bodyPr vert="horz" lIns="91440" tIns="45720" rIns="91440" bIns="45720" rtlCol="0"/>
+          <a:lstStyle/>
+          <a:p>
+            <a:pPr lvl="0"/>
+            <a:r>
+              <a:rPr lang="en-US"/>
+              <a:t>Click to edit Master text styles</a:t>
+            </a:r>
+          </a:p>
+          <a:p>
+            <a:pPr lvl="1"/>
+            <a:r>
+              <a:rPr lang="en-US"/>
+              <a:t>Second level</a:t>
+            </a:r>
+          </a:p>
+          <a:p>
+            <a:pPr lvl="2"/>
+            <a:r>
+              <a:rPr lang="en-US"/>
+              <a:t>Third level</a:t>
+            </a:r>
+          </a:p>
+          <a:p>
+            <a:pPr lvl="3"/>
+            <a:r>
+              <a:rPr lang="en-US"/>
+              <a:t>Fourth level</a:t>
+            </a:r>
+          </a:p>
+          <a:p>
+            <a:pPr lvl="4"/>
+            <a:r>
+              <a:rPr lang="en-US"/>
+              <a:t>Fifth level</a:t>
+            </a:r>
+            <a:endParaRPr lang="en-GB"/>
+          </a:p>
+        </p:txBody>
+      </p:sp>
+      <p:sp>
+        <p:nvSpPr>
+          <p:cNvPr id="6" name="Footer Placeholder 5"/>
+          <p:cNvSpPr>
+            <a:spLocks noGrp="1"/>
+          </p:cNvSpPr>
+          <p:nvPr>
+            <p:ph type="ftr" sz="quarter" idx="4"/>
+          </p:nvPr>
+        </p:nvSpPr>
+        <p:spPr>
+          <a:xfrm>
+            <a:off x="0" y="8685213"/>
+            <a:ext cx="2971800" cy="458787"/>
+          </a:xfrm>
+          <a:prstGeom prst="rect">
+            <a:avLst/>
+          </a:prstGeom>
+        </p:spPr>
+        <p:txBody>
+          <a:bodyPr vert="horz" lIns="91440" tIns="45720" rIns="91440" bIns="45720" rtlCol="0" anchor="b"/>
+          <a:lstStyle>
+            <a:lvl1pPr algn="l">
+              <a:defRPr sz="1200"/>
+            </a:lvl1pPr>
+          </a:lstStyle>
+          <a:p>
+            <a:endParaRPr lang="en-GB"/>
+          </a:p>
+        </p:txBody>
+      </p:sp>
+      <p:sp>
+        <p:nvSpPr>
+          <p:cNvPr id="7" name="Slide Number Placeholder 6"/>
+          <p:cNvSpPr>
+            <a:spLocks noGrp="1"/>
+          </p:cNvSpPr>
+          <p:nvPr>
+            <p:ph type="sldNum" sz="quarter" idx="5"/>
+          </p:nvPr>
+        </p:nvSpPr>
+        <p:spPr>
+          <a:xfrm>
+            <a:off x="3884613" y="8685213"/>
+            <a:ext cx="2971800" cy="458787"/>
+          </a:xfrm>
+          <a:prstGeom prst="rect">
+            <a:avLst/>
+          </a:prstGeom>
+        </p:spPr>
+        <p:txBody>
+          <a:bodyPr vert="horz" lIns="91440" tIns="45720" rIns="91440" bIns="45720" rtlCol="0" anchor="b"/>
+          <a:lstStyle>
+            <a:lvl1pPr algn="r">
+              <a:defRPr sz="1200"/>
+            </a:lvl1pPr>
+          </a:lstStyle>
+          <a:p>
+            <a:fld id="{6A95CA27-854A-4F67-82E4-3167AB381797}" type="slidenum">
+              <a:rPr lang="en-GB" smtClean="0"/>
+              <a:t>‹#›</a:t>
+            </a:fld>
+            <a:endParaRPr lang="en-GB"/>
+          </a:p>
+        </p:txBody>
+      </p:sp>
+    </p:spTree>
+    <p:extLst>
+      <p:ext uri="{BB962C8B-B14F-4D97-AF65-F5344CB8AC3E}">
+        <p14:creationId xmlns:p14="http://schemas.microsoft.com/office/powerpoint/2010/main" val="585117025"/>
+      </p:ext>
+    </p:extLst>
+  </p:cSld>
+  <p:clrMap bg1="lt1" tx1="dk1" bg2="lt2" tx2="dk2" accent1="accent1" accent2="accent2" accent3="accent3" accent4="accent4" accent5="accent5" accent6="accent6" hlink="hlink" folHlink="folHlink"/>
+  <p:notesStyle>
+    <a:lvl1pPr marL="0" algn="l" defTabSz="914400" rtl="0" eaLnBrk="1" latinLnBrk="0" hangingPunct="1">
+      <a:defRPr sz="1200" kern="1200">
+        <a:solidFill>
+          <a:schemeClr val="tx1"/>
+        </a:solidFill>
+        <a:latin typeface="+mn-lt"/>
+        <a:ea typeface="+mn-ea"/>
+        <a:cs typeface="+mn-cs"/>
+      </a:defRPr>
+    </a:lvl1pPr>
+    <a:lvl2pPr marL="457200" algn="l" defTabSz="914400" rtl="0" eaLnBrk="1" latinLnBrk="0" hangingPunct="1">
+      <a:defRPr sz="1200" kern="1200">
+        <a:solidFill>
+          <a:schemeClr val="tx1"/>
+        </a:solidFill>
+        <a:latin typeface="+mn-lt"/>
+        <a:ea typeface="+mn-ea"/>
+        <a:cs typeface="+mn-cs"/>
+      </a:defRPr>
+    </a:lvl2pPr>
+    <a:lvl3pPr marL="914400" algn="l" defTabSz="914400" rtl="0" eaLnBrk="1" latinLnBrk="0" hangingPunct="1">
+      <a:defRPr sz="1200" kern="1200">
+        <a:solidFill>
+          <a:schemeClr val="tx1"/>
+        </a:solidFill>
+        <a:latin typeface="+mn-lt"/>
+        <a:ea typeface="+mn-ea"/>
+        <a:cs typeface="+mn-cs"/>
+      </a:defRPr>
+    </a:lvl3pPr>
+    <a:lvl4pPr marL="1371600" algn="l" defTabSz="914400" rtl="0" eaLnBrk="1" latinLnBrk="0" hangingPunct="1">
+      <a:defRPr sz="1200" kern="1200">
+        <a:solidFill>
+          <a:schemeClr val="tx1"/>
+        </a:solidFill>
+        <a:latin typeface="+mn-lt"/>
+        <a:ea typeface="+mn-ea"/>
+        <a:cs typeface="+mn-cs"/>
+      </a:defRPr>
+    </a:lvl4pPr>
+    <a:lvl5pPr marL="1828800" algn="l" defTabSz="914400" rtl="0" eaLnBrk="1" latinLnBrk="0" hangingPunct="1">
+      <a:defRPr sz="1200" kern="1200">
+        <a:solidFill>
+          <a:schemeClr val="tx1"/>
+        </a:solidFill>
+        <a:latin typeface="+mn-lt"/>
+        <a:ea typeface="+mn-ea"/>
+        <a:cs typeface="+mn-cs"/>
+      </a:defRPr>
+    </a:lvl5pPr>
+    <a:lvl6pPr marL="2286000" algn="l" defTabSz="914400" rtl="0" eaLnBrk="1" latinLnBrk="0" hangingPunct="1">
+      <a:defRPr sz="1200" kern="1200">
+        <a:solidFill>
+          <a:schemeClr val="tx1"/>
+        </a:solidFill>
+        <a:latin typeface="+mn-lt"/>
+        <a:ea typeface="+mn-ea"/>
+        <a:cs typeface="+mn-cs"/>
+      </a:defRPr>
+    </a:lvl6pPr>
+    <a:lvl7pPr marL="2743200" algn="l" defTabSz="914400" rtl="0" eaLnBrk="1" latinLnBrk="0" hangingPunct="1">
+      <a:defRPr sz="1200" kern="1200">
+        <a:solidFill>
+          <a:schemeClr val="tx1"/>
+        </a:solidFill>
+        <a:latin typeface="+mn-lt"/>
+        <a:ea typeface="+mn-ea"/>
+        <a:cs typeface="+mn-cs"/>
+      </a:defRPr>
+    </a:lvl7pPr>
+    <a:lvl8pPr marL="3200400" algn="l" defTabSz="914400" rtl="0" eaLnBrk="1" latinLnBrk="0" hangingPunct="1">
+      <a:defRPr sz="1200" kern="1200">
+        <a:solidFill>
+          <a:schemeClr val="tx1"/>
+        </a:solidFill>
+        <a:latin typeface="+mn-lt"/>
+        <a:ea typeface="+mn-ea"/>
+        <a:cs typeface="+mn-cs"/>
+      </a:defRPr>
+    </a:lvl8pPr>
+    <a:lvl9pPr marL="3657600" algn="l" defTabSz="914400" rtl="0" eaLnBrk="1" latinLnBrk="0" hangingPunct="1">
+      <a:defRPr sz="1200" kern="1200">
+        <a:solidFill>
+          <a:schemeClr val="tx1"/>
+        </a:solidFill>
+        <a:latin typeface="+mn-lt"/>
+        <a:ea typeface="+mn-ea"/>
+        <a:cs typeface="+mn-cs"/>
+      </a:defRPr>
+    </a:lvl9pPr>
+  </p:notesStyle>
+</p:notesMaster>
+</file>
+
+<file path=ppt/notesSlides/notesSlide1.xml><?xml version="1.0" encoding="utf-8"?>
+<p:notes xmlns:a="http://schemas.openxmlformats.org/drawingml/2006/main" xmlns:r="http://schemas.openxmlformats.org/officeDocument/2006/relationships" xmlns:p="http://schemas.openxmlformats.org/presentationml/2006/main">
+  <p:cSld>
+    <p:spTree>
+      <p:nvGrpSpPr>
+        <p:cNvPr id="1" name=""/>
+        <p:cNvGrpSpPr/>
+        <p:nvPr/>
+      </p:nvGrpSpPr>
+      <p:grpSpPr>
+        <a:xfrm>
+          <a:off x="0" y="0"/>
+          <a:ext cx="0" cy="0"/>
+          <a:chOff x="0" y="0"/>
+          <a:chExt cx="0" cy="0"/>
+        </a:xfrm>
+      </p:grpSpPr>
+      <p:sp>
+        <p:nvSpPr>
+          <p:cNvPr id="2" name="Slide Image Placeholder 1"/>
+          <p:cNvSpPr>
+            <a:spLocks noGrp="1" noRot="1" noChangeAspect="1"/>
+          </p:cNvSpPr>
+          <p:nvPr>
+            <p:ph type="sldImg"/>
+          </p:nvPr>
+        </p:nvSpPr>
+        <p:spPr/>
+      </p:sp>
+      <p:sp>
+        <p:nvSpPr>
+          <p:cNvPr id="3" name="Notes Placeholder 2"/>
+          <p:cNvSpPr>
+            <a:spLocks noGrp="1"/>
+          </p:cNvSpPr>
+          <p:nvPr>
+            <p:ph type="body" idx="1"/>
+          </p:nvPr>
+        </p:nvSpPr>
+        <p:spPr/>
+        <p:txBody>
+          <a:bodyPr/>
+          <a:lstStyle/>
+          <a:p>
+            <a:pPr rtl="0"/>
+            <a:r>
+              <a:rPr lang="en-GB" sz="1200" kern="1200" dirty="0">
+                <a:solidFill>
+                  <a:schemeClr val="tx1"/>
+                </a:solidFill>
+                <a:effectLst/>
+                <a:latin typeface="+mn-lt"/>
+                <a:ea typeface="+mn-ea"/>
+                <a:cs typeface="+mn-cs"/>
+              </a:rPr>
+              <a:t>Based on the image provided in </a:t>
+            </a:r>
+            <a:r>
+              <a:rPr lang="en-GB" sz="1200" b="1" kern="1200" dirty="0">
+                <a:solidFill>
+                  <a:schemeClr val="tx1"/>
+                </a:solidFill>
+                <a:effectLst/>
+                <a:latin typeface="+mn-lt"/>
+                <a:ea typeface="+mn-ea"/>
+                <a:cs typeface="+mn-cs"/>
+              </a:rPr>
+              <a:t>Picture1.png</a:t>
+            </a:r>
+            <a:r>
+              <a:rPr lang="en-GB" sz="1200" kern="1200" dirty="0">
+                <a:solidFill>
+                  <a:schemeClr val="tx1"/>
+                </a:solidFill>
+                <a:effectLst/>
+                <a:latin typeface="+mn-lt"/>
+                <a:ea typeface="+mn-ea"/>
+                <a:cs typeface="+mn-cs"/>
+              </a:rPr>
+              <a:t>, here is a breakdown of each column in the </a:t>
+            </a:r>
+            <a:r>
+              <a:rPr lang="en-GB" sz="1200" b="1" kern="1200" dirty="0">
+                <a:solidFill>
+                  <a:schemeClr val="tx1"/>
+                </a:solidFill>
+                <a:effectLst/>
+                <a:latin typeface="+mn-lt"/>
+                <a:ea typeface="+mn-ea"/>
+                <a:cs typeface="+mn-cs"/>
+              </a:rPr>
+              <a:t>Per Read Metrics</a:t>
+            </a:r>
+            <a:r>
+              <a:rPr lang="en-GB" sz="1200" kern="1200" dirty="0">
+                <a:solidFill>
+                  <a:schemeClr val="tx1"/>
+                </a:solidFill>
+                <a:effectLst/>
+                <a:latin typeface="+mn-lt"/>
+                <a:ea typeface="+mn-ea"/>
+                <a:cs typeface="+mn-cs"/>
+              </a:rPr>
+              <a:t> and </a:t>
+            </a:r>
+            <a:r>
+              <a:rPr lang="en-GB" sz="1200" b="1" kern="1200" dirty="0">
+                <a:solidFill>
+                  <a:schemeClr val="tx1"/>
+                </a:solidFill>
+                <a:effectLst/>
+                <a:latin typeface="+mn-lt"/>
+                <a:ea typeface="+mn-ea"/>
+                <a:cs typeface="+mn-cs"/>
+              </a:rPr>
+              <a:t>Per Lane Metrics</a:t>
+            </a:r>
+            <a:r>
+              <a:rPr lang="en-GB" sz="1200" kern="1200" dirty="0">
+                <a:solidFill>
+                  <a:schemeClr val="tx1"/>
+                </a:solidFill>
+                <a:effectLst/>
+                <a:latin typeface="+mn-lt"/>
+                <a:ea typeface="+mn-ea"/>
+                <a:cs typeface="+mn-cs"/>
+              </a:rPr>
+              <a:t> tables and how they impact the assessment of your run quality:</a:t>
+            </a:r>
+          </a:p>
+          <a:p>
+            <a:pPr rtl="0"/>
+            <a:r>
+              <a:rPr lang="en-GB" sz="1200" b="1" kern="1200" dirty="0">
+                <a:solidFill>
+                  <a:schemeClr val="tx1"/>
+                </a:solidFill>
+                <a:effectLst/>
+                <a:latin typeface="+mn-lt"/>
+                <a:ea typeface="+mn-ea"/>
+                <a:cs typeface="+mn-cs"/>
+              </a:rPr>
+              <a:t>1. Cycles</a:t>
+            </a:r>
+          </a:p>
+          <a:p>
+            <a:pPr rtl="0"/>
+            <a:r>
+              <a:rPr lang="en-GB" sz="1200" b="1" kern="1200" dirty="0">
+                <a:solidFill>
+                  <a:schemeClr val="tx1"/>
+                </a:solidFill>
+                <a:effectLst/>
+                <a:latin typeface="+mn-lt"/>
+                <a:ea typeface="+mn-ea"/>
+                <a:cs typeface="+mn-cs"/>
+              </a:rPr>
+              <a:t>Data in Picture1.png:</a:t>
+            </a:r>
+            <a:r>
+              <a:rPr lang="en-GB" sz="1200" kern="1200" dirty="0">
+                <a:solidFill>
+                  <a:schemeClr val="tx1"/>
+                </a:solidFill>
+                <a:effectLst/>
+                <a:latin typeface="+mn-lt"/>
+                <a:ea typeface="+mn-ea"/>
+                <a:cs typeface="+mn-cs"/>
+              </a:rPr>
+              <a:t> Read 1 and Read 3 are </a:t>
+            </a:r>
+            <a:r>
+              <a:rPr lang="en-GB" sz="1200" b="1" kern="1200" dirty="0">
+                <a:solidFill>
+                  <a:schemeClr val="tx1"/>
+                </a:solidFill>
+                <a:effectLst/>
+                <a:latin typeface="+mn-lt"/>
+                <a:ea typeface="+mn-ea"/>
+                <a:cs typeface="+mn-cs"/>
+              </a:rPr>
+              <a:t>151 cycles</a:t>
+            </a:r>
+            <a:r>
+              <a:rPr lang="en-GB" sz="1200" kern="1200" dirty="0">
+                <a:solidFill>
+                  <a:schemeClr val="tx1"/>
+                </a:solidFill>
+                <a:effectLst/>
+                <a:latin typeface="+mn-lt"/>
+                <a:ea typeface="+mn-ea"/>
+                <a:cs typeface="+mn-cs"/>
+              </a:rPr>
+              <a:t>; Read 2 (I) is </a:t>
+            </a:r>
+            <a:r>
+              <a:rPr lang="en-GB" sz="1200" b="1" kern="1200" dirty="0">
+                <a:solidFill>
+                  <a:schemeClr val="tx1"/>
+                </a:solidFill>
+                <a:effectLst/>
+                <a:latin typeface="+mn-lt"/>
+                <a:ea typeface="+mn-ea"/>
+                <a:cs typeface="+mn-cs"/>
+              </a:rPr>
+              <a:t>6 cycles</a:t>
+            </a:r>
+            <a:r>
+              <a:rPr lang="en-GB" sz="1200" kern="1200" dirty="0">
+                <a:solidFill>
+                  <a:schemeClr val="tx1"/>
+                </a:solidFill>
+                <a:effectLst/>
+                <a:latin typeface="+mn-lt"/>
+                <a:ea typeface="+mn-ea"/>
+                <a:cs typeface="+mn-cs"/>
+              </a:rPr>
+              <a:t>.</a:t>
+            </a:r>
+          </a:p>
+          <a:p>
+            <a:pPr rtl="0"/>
+            <a:r>
+              <a:rPr lang="en-GB" sz="1200" b="1" kern="1200" dirty="0">
+                <a:solidFill>
+                  <a:schemeClr val="tx1"/>
+                </a:solidFill>
+                <a:effectLst/>
+                <a:latin typeface="+mn-lt"/>
+                <a:ea typeface="+mn-ea"/>
+                <a:cs typeface="+mn-cs"/>
+              </a:rPr>
+              <a:t>Importance:</a:t>
+            </a:r>
+            <a:r>
+              <a:rPr lang="en-GB" sz="1200" kern="1200" dirty="0">
+                <a:solidFill>
+                  <a:schemeClr val="tx1"/>
+                </a:solidFill>
+                <a:effectLst/>
+                <a:latin typeface="+mn-lt"/>
+                <a:ea typeface="+mn-ea"/>
+                <a:cs typeface="+mn-cs"/>
+              </a:rPr>
+              <a:t> This represents the number of bases sequenced for each read. It confirms that the machine completed the number of cycles defined in your sample sheet.</a:t>
+            </a:r>
+          </a:p>
+          <a:p>
+            <a:pPr rtl="0"/>
+            <a:r>
+              <a:rPr lang="en-GB" sz="1200" b="1" kern="1200" dirty="0">
+                <a:solidFill>
+                  <a:schemeClr val="tx1"/>
+                </a:solidFill>
+                <a:effectLst/>
+                <a:latin typeface="+mn-lt"/>
+                <a:ea typeface="+mn-ea"/>
+                <a:cs typeface="+mn-cs"/>
+              </a:rPr>
+              <a:t>2. Yield</a:t>
+            </a:r>
+          </a:p>
+          <a:p>
+            <a:pPr rtl="0"/>
+            <a:r>
+              <a:rPr lang="en-GB" sz="1200" b="1" kern="1200" dirty="0">
+                <a:solidFill>
+                  <a:schemeClr val="tx1"/>
+                </a:solidFill>
+                <a:effectLst/>
+                <a:latin typeface="+mn-lt"/>
+                <a:ea typeface="+mn-ea"/>
+                <a:cs typeface="+mn-cs"/>
+              </a:rPr>
+              <a:t>Data in Picture1.png:</a:t>
+            </a:r>
+            <a:r>
+              <a:rPr lang="en-GB" sz="1200" kern="1200" dirty="0">
+                <a:solidFill>
+                  <a:schemeClr val="tx1"/>
+                </a:solidFill>
+                <a:effectLst/>
+                <a:latin typeface="+mn-lt"/>
+                <a:ea typeface="+mn-ea"/>
+                <a:cs typeface="+mn-cs"/>
+              </a:rPr>
+              <a:t> The total yield is </a:t>
+            </a:r>
+            <a:r>
+              <a:rPr lang="en-GB" sz="1200" b="1" kern="1200" dirty="0">
+                <a:solidFill>
+                  <a:schemeClr val="tx1"/>
+                </a:solidFill>
+                <a:effectLst/>
+                <a:latin typeface="+mn-lt"/>
+                <a:ea typeface="+mn-ea"/>
+                <a:cs typeface="+mn-cs"/>
+              </a:rPr>
+              <a:t>3.26 </a:t>
+            </a:r>
+            <a:r>
+              <a:rPr lang="en-GB" sz="1200" b="1" kern="1200" dirty="0" err="1">
+                <a:solidFill>
+                  <a:schemeClr val="tx1"/>
+                </a:solidFill>
+                <a:effectLst/>
+                <a:latin typeface="+mn-lt"/>
+                <a:ea typeface="+mn-ea"/>
+                <a:cs typeface="+mn-cs"/>
+              </a:rPr>
+              <a:t>Gbp</a:t>
+            </a:r>
+            <a:r>
+              <a:rPr lang="en-GB" sz="1200" kern="1200" dirty="0">
+                <a:solidFill>
+                  <a:schemeClr val="tx1"/>
+                </a:solidFill>
+                <a:effectLst/>
+                <a:latin typeface="+mn-lt"/>
+                <a:ea typeface="+mn-ea"/>
+                <a:cs typeface="+mn-cs"/>
+              </a:rPr>
+              <a:t>.</a:t>
+            </a:r>
+          </a:p>
+          <a:p>
+            <a:pPr rtl="0"/>
+            <a:r>
+              <a:rPr lang="en-GB" sz="1200" b="1" kern="1200" dirty="0">
+                <a:solidFill>
+                  <a:schemeClr val="tx1"/>
+                </a:solidFill>
+                <a:effectLst/>
+                <a:latin typeface="+mn-lt"/>
+                <a:ea typeface="+mn-ea"/>
+                <a:cs typeface="+mn-cs"/>
+              </a:rPr>
+              <a:t>Importance:</a:t>
+            </a:r>
+            <a:r>
+              <a:rPr lang="en-GB" sz="1200" kern="1200" dirty="0">
+                <a:solidFill>
+                  <a:schemeClr val="tx1"/>
+                </a:solidFill>
+                <a:effectLst/>
+                <a:latin typeface="+mn-lt"/>
+                <a:ea typeface="+mn-ea"/>
+                <a:cs typeface="+mn-cs"/>
+              </a:rPr>
+              <a:t> This is the total number of bases generated that passed filter (PF). It determines if you have enough raw data to meet the coverage requirements for your specific experiment.</a:t>
+            </a:r>
+          </a:p>
+          <a:p>
+            <a:pPr rtl="0"/>
+            <a:r>
+              <a:rPr lang="en-GB" sz="1200" b="1" kern="1200" dirty="0">
+                <a:solidFill>
+                  <a:schemeClr val="tx1"/>
+                </a:solidFill>
+                <a:effectLst/>
+                <a:latin typeface="+mn-lt"/>
+                <a:ea typeface="+mn-ea"/>
+                <a:cs typeface="+mn-cs"/>
+              </a:rPr>
+              <a:t>3. Aligned (%)</a:t>
+            </a:r>
+          </a:p>
+          <a:p>
+            <a:pPr rtl="0"/>
+            <a:r>
+              <a:rPr lang="en-GB" sz="1200" b="1" kern="1200" dirty="0">
+                <a:solidFill>
+                  <a:schemeClr val="tx1"/>
+                </a:solidFill>
+                <a:effectLst/>
+                <a:latin typeface="+mn-lt"/>
+                <a:ea typeface="+mn-ea"/>
+                <a:cs typeface="+mn-cs"/>
+              </a:rPr>
+              <a:t>Data in Picture1.png:</a:t>
+            </a:r>
+            <a:r>
+              <a:rPr lang="en-GB" sz="1200" kern="1200" dirty="0">
+                <a:solidFill>
+                  <a:schemeClr val="tx1"/>
+                </a:solidFill>
+                <a:effectLst/>
+                <a:latin typeface="+mn-lt"/>
+                <a:ea typeface="+mn-ea"/>
+                <a:cs typeface="+mn-cs"/>
+              </a:rPr>
+              <a:t> Read 1 is </a:t>
+            </a:r>
+            <a:r>
+              <a:rPr lang="en-GB" sz="1200" b="1" kern="1200" dirty="0">
+                <a:solidFill>
+                  <a:schemeClr val="tx1"/>
+                </a:solidFill>
+                <a:effectLst/>
+                <a:latin typeface="+mn-lt"/>
+                <a:ea typeface="+mn-ea"/>
+                <a:cs typeface="+mn-cs"/>
+              </a:rPr>
+              <a:t>17.69%</a:t>
+            </a:r>
+            <a:r>
+              <a:rPr lang="en-GB" sz="1200" kern="1200" dirty="0">
+                <a:solidFill>
+                  <a:schemeClr val="tx1"/>
+                </a:solidFill>
+                <a:effectLst/>
+                <a:latin typeface="+mn-lt"/>
+                <a:ea typeface="+mn-ea"/>
+                <a:cs typeface="+mn-cs"/>
+              </a:rPr>
+              <a:t>; Read 3 is </a:t>
+            </a:r>
+            <a:r>
+              <a:rPr lang="en-GB" sz="1200" b="1" kern="1200" dirty="0">
+                <a:solidFill>
+                  <a:schemeClr val="tx1"/>
+                </a:solidFill>
+                <a:effectLst/>
+                <a:latin typeface="+mn-lt"/>
+                <a:ea typeface="+mn-ea"/>
+                <a:cs typeface="+mn-cs"/>
+              </a:rPr>
+              <a:t>17.52%</a:t>
+            </a:r>
+            <a:r>
+              <a:rPr lang="en-GB" sz="1200" kern="1200" dirty="0">
+                <a:solidFill>
+                  <a:schemeClr val="tx1"/>
+                </a:solidFill>
+                <a:effectLst/>
+                <a:latin typeface="+mn-lt"/>
+                <a:ea typeface="+mn-ea"/>
+                <a:cs typeface="+mn-cs"/>
+              </a:rPr>
+              <a:t>; Read 2 (I) is </a:t>
+            </a:r>
+            <a:r>
+              <a:rPr lang="en-GB" sz="1200" b="1" kern="1200" dirty="0">
+                <a:solidFill>
+                  <a:schemeClr val="tx1"/>
+                </a:solidFill>
+                <a:effectLst/>
+                <a:latin typeface="+mn-lt"/>
+                <a:ea typeface="+mn-ea"/>
+                <a:cs typeface="+mn-cs"/>
+              </a:rPr>
+              <a:t>0.00%</a:t>
+            </a:r>
+            <a:r>
+              <a:rPr lang="en-GB" sz="1200" kern="1200" dirty="0">
+                <a:solidFill>
+                  <a:schemeClr val="tx1"/>
+                </a:solidFill>
+                <a:effectLst/>
+                <a:latin typeface="+mn-lt"/>
+                <a:ea typeface="+mn-ea"/>
+                <a:cs typeface="+mn-cs"/>
+              </a:rPr>
+              <a:t>.</a:t>
+            </a:r>
+          </a:p>
+          <a:p>
+            <a:pPr rtl="0"/>
+            <a:r>
+              <a:rPr lang="en-GB" sz="1200" b="1" kern="1200" dirty="0">
+                <a:solidFill>
+                  <a:schemeClr val="tx1"/>
+                </a:solidFill>
+                <a:effectLst/>
+                <a:latin typeface="+mn-lt"/>
+                <a:ea typeface="+mn-ea"/>
+                <a:cs typeface="+mn-cs"/>
+              </a:rPr>
+              <a:t>Importance:</a:t>
+            </a:r>
+            <a:r>
+              <a:rPr lang="en-GB" sz="1200" kern="1200" dirty="0">
+                <a:solidFill>
+                  <a:schemeClr val="tx1"/>
+                </a:solidFill>
+                <a:effectLst/>
+                <a:latin typeface="+mn-lt"/>
+                <a:ea typeface="+mn-ea"/>
+                <a:cs typeface="+mn-cs"/>
+              </a:rPr>
+              <a:t> This shows the percentage of reads that aligned to a </a:t>
+            </a:r>
+            <a:r>
+              <a:rPr lang="en-GB" sz="1200" kern="1200" dirty="0" err="1">
+                <a:solidFill>
+                  <a:schemeClr val="tx1"/>
+                </a:solidFill>
+                <a:effectLst/>
+                <a:latin typeface="+mn-lt"/>
+                <a:ea typeface="+mn-ea"/>
+                <a:cs typeface="+mn-cs"/>
+              </a:rPr>
+              <a:t>PhiX</a:t>
+            </a:r>
+            <a:r>
+              <a:rPr lang="en-GB" sz="1200" kern="1200" dirty="0">
+                <a:solidFill>
+                  <a:schemeClr val="tx1"/>
+                </a:solidFill>
+                <a:effectLst/>
+                <a:latin typeface="+mn-lt"/>
+                <a:ea typeface="+mn-ea"/>
+                <a:cs typeface="+mn-cs"/>
+              </a:rPr>
+              <a:t> control spike-in. Since Index reads are not aligned to a reference, they show 0%. A stable alignment percentage across Read 1 and 3 suggests consistent sequencing quality.</a:t>
+            </a:r>
+          </a:p>
+          <a:p>
+            <a:pPr rtl="0"/>
+            <a:r>
+              <a:rPr lang="en-GB" sz="1200" b="1" kern="1200" dirty="0">
+                <a:solidFill>
+                  <a:schemeClr val="tx1"/>
+                </a:solidFill>
+                <a:effectLst/>
+                <a:latin typeface="+mn-lt"/>
+                <a:ea typeface="+mn-ea"/>
+                <a:cs typeface="+mn-cs"/>
+              </a:rPr>
+              <a:t>4. Error Rate (%)</a:t>
+            </a:r>
+          </a:p>
+          <a:p>
+            <a:pPr rtl="0"/>
+            <a:r>
+              <a:rPr lang="en-GB" sz="1200" b="1" kern="1200" dirty="0">
+                <a:solidFill>
+                  <a:schemeClr val="tx1"/>
+                </a:solidFill>
+                <a:effectLst/>
+                <a:latin typeface="+mn-lt"/>
+                <a:ea typeface="+mn-ea"/>
+                <a:cs typeface="+mn-cs"/>
+              </a:rPr>
+              <a:t>Data in Picture1.png:</a:t>
+            </a:r>
+            <a:r>
+              <a:rPr lang="en-GB" sz="1200" kern="1200" dirty="0">
+                <a:solidFill>
+                  <a:schemeClr val="tx1"/>
+                </a:solidFill>
+                <a:effectLst/>
+                <a:latin typeface="+mn-lt"/>
+                <a:ea typeface="+mn-ea"/>
+                <a:cs typeface="+mn-cs"/>
+              </a:rPr>
+              <a:t> Read 1 is </a:t>
+            </a:r>
+            <a:r>
+              <a:rPr lang="en-GB" sz="1200" b="1" kern="1200" dirty="0">
+                <a:solidFill>
+                  <a:schemeClr val="tx1"/>
+                </a:solidFill>
+                <a:effectLst/>
+                <a:latin typeface="+mn-lt"/>
+                <a:ea typeface="+mn-ea"/>
+                <a:cs typeface="+mn-cs"/>
+              </a:rPr>
+              <a:t>0.53%</a:t>
+            </a:r>
+            <a:r>
+              <a:rPr lang="en-GB" sz="1200" kern="1200" dirty="0">
+                <a:solidFill>
+                  <a:schemeClr val="tx1"/>
+                </a:solidFill>
+                <a:effectLst/>
+                <a:latin typeface="+mn-lt"/>
+                <a:ea typeface="+mn-ea"/>
+                <a:cs typeface="+mn-cs"/>
+              </a:rPr>
+              <a:t> and Read 3 is </a:t>
+            </a:r>
+            <a:r>
+              <a:rPr lang="en-GB" sz="1200" b="1" kern="1200" dirty="0">
+                <a:solidFill>
+                  <a:schemeClr val="tx1"/>
+                </a:solidFill>
+                <a:effectLst/>
+                <a:latin typeface="+mn-lt"/>
+                <a:ea typeface="+mn-ea"/>
+                <a:cs typeface="+mn-cs"/>
+              </a:rPr>
+              <a:t>0.46%</a:t>
+            </a:r>
+            <a:r>
+              <a:rPr lang="en-GB" sz="1200" kern="1200" dirty="0">
+                <a:solidFill>
+                  <a:schemeClr val="tx1"/>
+                </a:solidFill>
+                <a:effectLst/>
+                <a:latin typeface="+mn-lt"/>
+                <a:ea typeface="+mn-ea"/>
+                <a:cs typeface="+mn-cs"/>
+              </a:rPr>
+              <a:t>.</a:t>
+            </a:r>
+          </a:p>
+          <a:p>
+            <a:pPr rtl="0"/>
+            <a:r>
+              <a:rPr lang="en-GB" sz="1200" b="1" kern="1200" dirty="0">
+                <a:solidFill>
+                  <a:schemeClr val="tx1"/>
+                </a:solidFill>
+                <a:effectLst/>
+                <a:latin typeface="+mn-lt"/>
+                <a:ea typeface="+mn-ea"/>
+                <a:cs typeface="+mn-cs"/>
+              </a:rPr>
+              <a:t>Importance:</a:t>
+            </a:r>
+            <a:r>
+              <a:rPr lang="en-GB" sz="1200" kern="1200" dirty="0">
+                <a:solidFill>
+                  <a:schemeClr val="tx1"/>
+                </a:solidFill>
+                <a:effectLst/>
+                <a:latin typeface="+mn-lt"/>
+                <a:ea typeface="+mn-ea"/>
+                <a:cs typeface="+mn-cs"/>
+              </a:rPr>
+              <a:t> This is calculated based on the </a:t>
+            </a:r>
+            <a:r>
+              <a:rPr lang="en-GB" sz="1200" kern="1200" dirty="0" err="1">
+                <a:solidFill>
+                  <a:schemeClr val="tx1"/>
+                </a:solidFill>
+                <a:effectLst/>
+                <a:latin typeface="+mn-lt"/>
+                <a:ea typeface="+mn-ea"/>
+                <a:cs typeface="+mn-cs"/>
+              </a:rPr>
+              <a:t>PhiX</a:t>
+            </a:r>
+            <a:r>
+              <a:rPr lang="en-GB" sz="1200" kern="1200" dirty="0">
+                <a:solidFill>
+                  <a:schemeClr val="tx1"/>
+                </a:solidFill>
+                <a:effectLst/>
+                <a:latin typeface="+mn-lt"/>
+                <a:ea typeface="+mn-ea"/>
+                <a:cs typeface="+mn-cs"/>
+              </a:rPr>
+              <a:t> alignment. In high-quality runs, this should generally be </a:t>
+            </a:r>
+            <a:r>
+              <a:rPr lang="en-GB" sz="1200" b="1" kern="1200" dirty="0">
+                <a:solidFill>
+                  <a:schemeClr val="tx1"/>
+                </a:solidFill>
+                <a:effectLst/>
+                <a:latin typeface="+mn-lt"/>
+                <a:ea typeface="+mn-ea"/>
+                <a:cs typeface="+mn-cs"/>
+              </a:rPr>
+              <a:t>under 1%</a:t>
+            </a:r>
+            <a:r>
+              <a:rPr lang="en-GB" sz="1200" kern="1200" dirty="0">
+                <a:solidFill>
+                  <a:schemeClr val="tx1"/>
+                </a:solidFill>
+                <a:effectLst/>
+                <a:latin typeface="+mn-lt"/>
+                <a:ea typeface="+mn-ea"/>
+                <a:cs typeface="+mn-cs"/>
+              </a:rPr>
+              <a:t>. Your values (~0.5%) indicate a very successful, low-error run.</a:t>
+            </a:r>
+          </a:p>
+          <a:p>
+            <a:pPr rtl="0"/>
+            <a:r>
+              <a:rPr lang="en-GB" sz="1200" b="1" kern="1200" dirty="0">
+                <a:solidFill>
+                  <a:schemeClr val="tx1"/>
+                </a:solidFill>
+                <a:effectLst/>
+                <a:latin typeface="+mn-lt"/>
+                <a:ea typeface="+mn-ea"/>
+                <a:cs typeface="+mn-cs"/>
+              </a:rPr>
+              <a:t>5. Intensity Cycle 1</a:t>
+            </a:r>
+          </a:p>
+          <a:p>
+            <a:pPr rtl="0"/>
+            <a:r>
+              <a:rPr lang="en-GB" sz="1200" b="1" kern="1200" dirty="0">
+                <a:solidFill>
+                  <a:schemeClr val="tx1"/>
+                </a:solidFill>
+                <a:effectLst/>
+                <a:latin typeface="+mn-lt"/>
+                <a:ea typeface="+mn-ea"/>
+                <a:cs typeface="+mn-cs"/>
+              </a:rPr>
+              <a:t>Data in Picture1.png:</a:t>
+            </a:r>
+            <a:r>
+              <a:rPr lang="en-GB" sz="1200" kern="1200" dirty="0">
+                <a:solidFill>
+                  <a:schemeClr val="tx1"/>
+                </a:solidFill>
+                <a:effectLst/>
+                <a:latin typeface="+mn-lt"/>
+                <a:ea typeface="+mn-ea"/>
+                <a:cs typeface="+mn-cs"/>
+              </a:rPr>
+              <a:t> Values range from </a:t>
+            </a:r>
+            <a:r>
+              <a:rPr lang="en-GB" sz="1200" b="1" kern="1200" dirty="0">
+                <a:solidFill>
+                  <a:schemeClr val="tx1"/>
+                </a:solidFill>
+                <a:effectLst/>
+                <a:latin typeface="+mn-lt"/>
+                <a:ea typeface="+mn-ea"/>
+                <a:cs typeface="+mn-cs"/>
+              </a:rPr>
+              <a:t>108</a:t>
+            </a:r>
+            <a:r>
+              <a:rPr lang="en-GB" sz="1200" kern="1200" dirty="0">
+                <a:solidFill>
+                  <a:schemeClr val="tx1"/>
+                </a:solidFill>
+                <a:effectLst/>
+                <a:latin typeface="+mn-lt"/>
+                <a:ea typeface="+mn-ea"/>
+                <a:cs typeface="+mn-cs"/>
+              </a:rPr>
+              <a:t> (Index) to </a:t>
+            </a:r>
+            <a:r>
+              <a:rPr lang="en-GB" sz="1200" b="1" kern="1200" dirty="0">
+                <a:solidFill>
+                  <a:schemeClr val="tx1"/>
+                </a:solidFill>
+                <a:effectLst/>
+                <a:latin typeface="+mn-lt"/>
+                <a:ea typeface="+mn-ea"/>
+                <a:cs typeface="+mn-cs"/>
+              </a:rPr>
+              <a:t>238</a:t>
+            </a:r>
+            <a:r>
+              <a:rPr lang="en-GB" sz="1200" kern="1200" dirty="0">
+                <a:solidFill>
+                  <a:schemeClr val="tx1"/>
+                </a:solidFill>
+                <a:effectLst/>
+                <a:latin typeface="+mn-lt"/>
+                <a:ea typeface="+mn-ea"/>
+                <a:cs typeface="+mn-cs"/>
+              </a:rPr>
+              <a:t> (Read 1).</a:t>
+            </a:r>
+          </a:p>
+          <a:p>
+            <a:pPr rtl="0"/>
+            <a:r>
+              <a:rPr lang="en-GB" sz="1200" b="1" kern="1200" dirty="0">
+                <a:solidFill>
+                  <a:schemeClr val="tx1"/>
+                </a:solidFill>
+                <a:effectLst/>
+                <a:latin typeface="+mn-lt"/>
+                <a:ea typeface="+mn-ea"/>
+                <a:cs typeface="+mn-cs"/>
+              </a:rPr>
+              <a:t>Importance:</a:t>
+            </a:r>
+            <a:r>
+              <a:rPr lang="en-GB" sz="1200" kern="1200" dirty="0">
+                <a:solidFill>
+                  <a:schemeClr val="tx1"/>
+                </a:solidFill>
+                <a:effectLst/>
+                <a:latin typeface="+mn-lt"/>
+                <a:ea typeface="+mn-ea"/>
+                <a:cs typeface="+mn-cs"/>
+              </a:rPr>
+              <a:t> This measures the brightness of the fluorescent signal at the first cycle. If this number is too low, the software may struggle to identify clusters; if too high, it may indicate over-clustering or signal saturation.</a:t>
+            </a:r>
+          </a:p>
+          <a:p>
+            <a:pPr rtl="0"/>
+            <a:r>
+              <a:rPr lang="en-GB" sz="1200" b="1" kern="1200" dirty="0">
+                <a:solidFill>
+                  <a:schemeClr val="tx1"/>
+                </a:solidFill>
+                <a:effectLst/>
+                <a:latin typeface="+mn-lt"/>
+                <a:ea typeface="+mn-ea"/>
+                <a:cs typeface="+mn-cs"/>
+              </a:rPr>
+              <a:t>6. % ≥ Q30</a:t>
+            </a:r>
+          </a:p>
+          <a:p>
+            <a:pPr rtl="0"/>
+            <a:r>
+              <a:rPr lang="en-GB" sz="1200" b="1" kern="1200" dirty="0">
+                <a:solidFill>
+                  <a:schemeClr val="tx1"/>
+                </a:solidFill>
+                <a:effectLst/>
+                <a:latin typeface="+mn-lt"/>
+                <a:ea typeface="+mn-ea"/>
+                <a:cs typeface="+mn-cs"/>
+              </a:rPr>
+              <a:t>Data in Picture1.png:</a:t>
+            </a:r>
+            <a:r>
+              <a:rPr lang="en-GB" sz="1200" kern="1200" dirty="0">
+                <a:solidFill>
+                  <a:schemeClr val="tx1"/>
+                </a:solidFill>
+                <a:effectLst/>
+                <a:latin typeface="+mn-lt"/>
+                <a:ea typeface="+mn-ea"/>
+                <a:cs typeface="+mn-cs"/>
+              </a:rPr>
+              <a:t> The run total is </a:t>
+            </a:r>
+            <a:r>
+              <a:rPr lang="en-GB" sz="1200" b="1" kern="1200" dirty="0">
+                <a:solidFill>
+                  <a:schemeClr val="tx1"/>
+                </a:solidFill>
+                <a:effectLst/>
+                <a:latin typeface="+mn-lt"/>
+                <a:ea typeface="+mn-ea"/>
+                <a:cs typeface="+mn-cs"/>
+              </a:rPr>
+              <a:t>97.23%</a:t>
+            </a:r>
+            <a:r>
+              <a:rPr lang="en-GB" sz="1200" kern="1200" dirty="0">
+                <a:solidFill>
+                  <a:schemeClr val="tx1"/>
+                </a:solidFill>
+                <a:effectLst/>
+                <a:latin typeface="+mn-lt"/>
+                <a:ea typeface="+mn-ea"/>
+                <a:cs typeface="+mn-cs"/>
+              </a:rPr>
+              <a:t>.</a:t>
+            </a:r>
+          </a:p>
+          <a:p>
+            <a:pPr rtl="0"/>
+            <a:r>
+              <a:rPr lang="en-GB" sz="1200" b="1" kern="1200" dirty="0">
+                <a:solidFill>
+                  <a:schemeClr val="tx1"/>
+                </a:solidFill>
+                <a:effectLst/>
+                <a:latin typeface="+mn-lt"/>
+                <a:ea typeface="+mn-ea"/>
+                <a:cs typeface="+mn-cs"/>
+              </a:rPr>
+              <a:t>Importance:</a:t>
+            </a:r>
+            <a:r>
+              <a:rPr lang="en-GB" sz="1200" kern="1200" dirty="0">
+                <a:solidFill>
+                  <a:schemeClr val="tx1"/>
+                </a:solidFill>
+                <a:effectLst/>
+                <a:latin typeface="+mn-lt"/>
+                <a:ea typeface="+mn-ea"/>
+                <a:cs typeface="+mn-cs"/>
+              </a:rPr>
+              <a:t> This is the gold standard for quality. It represents the percentage of bases with a quality score of 30 or higher (meaning a 1 in 1000 chance of an incorrect base call). Your score of &gt;97% is excellent for a </a:t>
+            </a:r>
+            <a:r>
+              <a:rPr lang="en-GB" sz="1200" kern="1200" dirty="0" err="1">
+                <a:solidFill>
+                  <a:schemeClr val="tx1"/>
+                </a:solidFill>
+                <a:effectLst/>
+                <a:latin typeface="+mn-lt"/>
+                <a:ea typeface="+mn-ea"/>
+                <a:cs typeface="+mn-cs"/>
+              </a:rPr>
+              <a:t>MiSeq</a:t>
+            </a:r>
+            <a:r>
+              <a:rPr lang="en-GB" sz="1200" kern="1200" dirty="0">
+                <a:solidFill>
+                  <a:schemeClr val="tx1"/>
+                </a:solidFill>
+                <a:effectLst/>
+                <a:latin typeface="+mn-lt"/>
+                <a:ea typeface="+mn-ea"/>
+                <a:cs typeface="+mn-cs"/>
+              </a:rPr>
+              <a:t> run.</a:t>
+            </a:r>
+          </a:p>
+          <a:p>
+            <a:pPr rtl="0"/>
+            <a:r>
+              <a:rPr lang="en-GB" sz="1200" b="1" kern="1200" dirty="0">
+                <a:solidFill>
+                  <a:schemeClr val="tx1"/>
+                </a:solidFill>
+                <a:effectLst/>
+                <a:latin typeface="+mn-lt"/>
+                <a:ea typeface="+mn-ea"/>
+                <a:cs typeface="+mn-cs"/>
+              </a:rPr>
+              <a:t>7. Cluster PF (%)</a:t>
+            </a:r>
+          </a:p>
+          <a:p>
+            <a:pPr rtl="0"/>
+            <a:r>
+              <a:rPr lang="en-GB" sz="1200" b="1" kern="1200" dirty="0">
+                <a:solidFill>
+                  <a:schemeClr val="tx1"/>
+                </a:solidFill>
+                <a:effectLst/>
+                <a:latin typeface="+mn-lt"/>
+                <a:ea typeface="+mn-ea"/>
+                <a:cs typeface="+mn-cs"/>
+              </a:rPr>
+              <a:t>Data in Picture1.png:</a:t>
+            </a:r>
+            <a:r>
+              <a:rPr lang="en-GB" sz="1200" kern="1200" dirty="0">
+                <a:solidFill>
+                  <a:schemeClr val="tx1"/>
+                </a:solidFill>
+                <a:effectLst/>
+                <a:latin typeface="+mn-lt"/>
+                <a:ea typeface="+mn-ea"/>
+                <a:cs typeface="+mn-cs"/>
+              </a:rPr>
+              <a:t> </a:t>
+            </a:r>
+            <a:r>
+              <a:rPr lang="en-GB" sz="1200" b="1" kern="1200" dirty="0">
+                <a:solidFill>
+                  <a:schemeClr val="tx1"/>
+                </a:solidFill>
+                <a:effectLst/>
+                <a:latin typeface="+mn-lt"/>
+                <a:ea typeface="+mn-ea"/>
+                <a:cs typeface="+mn-cs"/>
+              </a:rPr>
+              <a:t>95.45%</a:t>
+            </a:r>
+            <a:r>
+              <a:rPr lang="en-GB" sz="1200" kern="1200" dirty="0">
+                <a:solidFill>
+                  <a:schemeClr val="tx1"/>
+                </a:solidFill>
+                <a:effectLst/>
+                <a:latin typeface="+mn-lt"/>
+                <a:ea typeface="+mn-ea"/>
+                <a:cs typeface="+mn-cs"/>
+              </a:rPr>
+              <a:t>.</a:t>
+            </a:r>
+          </a:p>
+          <a:p>
+            <a:pPr rtl="0"/>
+            <a:r>
+              <a:rPr lang="en-GB" sz="1200" b="1" kern="1200" dirty="0">
+                <a:solidFill>
+                  <a:schemeClr val="tx1"/>
+                </a:solidFill>
+                <a:effectLst/>
+                <a:latin typeface="+mn-lt"/>
+                <a:ea typeface="+mn-ea"/>
+                <a:cs typeface="+mn-cs"/>
+              </a:rPr>
+              <a:t>Importance:</a:t>
+            </a:r>
+            <a:r>
+              <a:rPr lang="en-GB" sz="1200" kern="1200" dirty="0">
+                <a:solidFill>
+                  <a:schemeClr val="tx1"/>
+                </a:solidFill>
+                <a:effectLst/>
+                <a:latin typeface="+mn-lt"/>
+                <a:ea typeface="+mn-ea"/>
+                <a:cs typeface="+mn-cs"/>
+              </a:rPr>
+              <a:t> "PF" stands for </a:t>
+            </a:r>
+            <a:r>
+              <a:rPr lang="en-GB" sz="1200" b="1" kern="1200" dirty="0">
+                <a:solidFill>
+                  <a:schemeClr val="tx1"/>
+                </a:solidFill>
+                <a:effectLst/>
+                <a:latin typeface="+mn-lt"/>
+                <a:ea typeface="+mn-ea"/>
+                <a:cs typeface="+mn-cs"/>
+              </a:rPr>
+              <a:t>Passed Filter</a:t>
+            </a:r>
+            <a:r>
+              <a:rPr lang="en-GB" sz="1200" kern="1200" dirty="0">
+                <a:solidFill>
+                  <a:schemeClr val="tx1"/>
+                </a:solidFill>
+                <a:effectLst/>
+                <a:latin typeface="+mn-lt"/>
+                <a:ea typeface="+mn-ea"/>
+                <a:cs typeface="+mn-cs"/>
+              </a:rPr>
+              <a:t>. This tells you what percentage of the DNA clusters on the flow cell were "clean" enough to be sequenced. A high percentage (usually &gt;80%) indicates good library preparation and proper loading concentration.</a:t>
+            </a:r>
+          </a:p>
+          <a:p>
+            <a:pPr rtl="0"/>
+            <a:r>
+              <a:rPr lang="en-GB" sz="1200" b="1" kern="1200" dirty="0">
+                <a:solidFill>
+                  <a:schemeClr val="tx1"/>
+                </a:solidFill>
+                <a:effectLst/>
+                <a:latin typeface="+mn-lt"/>
+                <a:ea typeface="+mn-ea"/>
+                <a:cs typeface="+mn-cs"/>
+              </a:rPr>
+              <a:t>8. Reads PF</a:t>
+            </a:r>
+          </a:p>
+          <a:p>
+            <a:pPr rtl="0"/>
+            <a:r>
+              <a:rPr lang="en-GB" sz="1200" b="1" kern="1200" dirty="0">
+                <a:solidFill>
+                  <a:schemeClr val="tx1"/>
+                </a:solidFill>
+                <a:effectLst/>
+                <a:latin typeface="+mn-lt"/>
+                <a:ea typeface="+mn-ea"/>
+                <a:cs typeface="+mn-cs"/>
+              </a:rPr>
+              <a:t>Data in Picture1.png:</a:t>
+            </a:r>
+            <a:r>
+              <a:rPr lang="en-GB" sz="1200" kern="1200" dirty="0">
+                <a:solidFill>
+                  <a:schemeClr val="tx1"/>
+                </a:solidFill>
+                <a:effectLst/>
+                <a:latin typeface="+mn-lt"/>
+                <a:ea typeface="+mn-ea"/>
+                <a:cs typeface="+mn-cs"/>
+              </a:rPr>
+              <a:t> </a:t>
+            </a:r>
+            <a:r>
+              <a:rPr lang="en-GB" sz="1200" b="1" kern="1200" dirty="0">
+                <a:solidFill>
+                  <a:schemeClr val="tx1"/>
+                </a:solidFill>
+                <a:effectLst/>
+                <a:latin typeface="+mn-lt"/>
+                <a:ea typeface="+mn-ea"/>
+                <a:cs typeface="+mn-cs"/>
+              </a:rPr>
+              <a:t>10,694,353</a:t>
+            </a:r>
+            <a:r>
+              <a:rPr lang="en-GB" sz="1200" kern="1200" dirty="0">
+                <a:solidFill>
+                  <a:schemeClr val="tx1"/>
+                </a:solidFill>
+                <a:effectLst/>
+                <a:latin typeface="+mn-lt"/>
+                <a:ea typeface="+mn-ea"/>
+                <a:cs typeface="+mn-cs"/>
+              </a:rPr>
+              <a:t>.</a:t>
+            </a:r>
+          </a:p>
+          <a:p>
+            <a:pPr rtl="0"/>
+            <a:r>
+              <a:rPr lang="en-GB" sz="1200" b="1" kern="1200" dirty="0">
+                <a:solidFill>
+                  <a:schemeClr val="tx1"/>
+                </a:solidFill>
+                <a:effectLst/>
+                <a:latin typeface="+mn-lt"/>
+                <a:ea typeface="+mn-ea"/>
+                <a:cs typeface="+mn-cs"/>
+              </a:rPr>
+              <a:t>Importance:</a:t>
+            </a:r>
+            <a:r>
+              <a:rPr lang="en-GB" sz="1200" kern="1200" dirty="0">
+                <a:solidFill>
+                  <a:schemeClr val="tx1"/>
+                </a:solidFill>
+                <a:effectLst/>
+                <a:latin typeface="+mn-lt"/>
+                <a:ea typeface="+mn-ea"/>
+                <a:cs typeface="+mn-cs"/>
+              </a:rPr>
+              <a:t> This is the actual number of individual DNA strings (clusters) that were successfully sequenced. This number is critical for knowing if you have enough "reads" to find rare variants or achieve deep coverage.</a:t>
+            </a:r>
+          </a:p>
+          <a:p>
+            <a:pPr rtl="0"/>
+            <a:r>
+              <a:rPr lang="en-GB" sz="1200" b="1" kern="1200" dirty="0">
+                <a:solidFill>
+                  <a:schemeClr val="tx1"/>
+                </a:solidFill>
+                <a:effectLst/>
+                <a:latin typeface="+mn-lt"/>
+                <a:ea typeface="+mn-ea"/>
+                <a:cs typeface="+mn-cs"/>
+              </a:rPr>
+              <a:t>9. Density</a:t>
+            </a:r>
+          </a:p>
+          <a:p>
+            <a:pPr rtl="0"/>
+            <a:r>
+              <a:rPr lang="en-GB" sz="1200" b="1" kern="1200" dirty="0">
+                <a:solidFill>
+                  <a:schemeClr val="tx1"/>
+                </a:solidFill>
+                <a:effectLst/>
+                <a:latin typeface="+mn-lt"/>
+                <a:ea typeface="+mn-ea"/>
+                <a:cs typeface="+mn-cs"/>
+              </a:rPr>
+              <a:t>Data in Picture1.png:</a:t>
+            </a:r>
+            <a:r>
+              <a:rPr lang="en-GB" sz="1200" kern="1200" dirty="0">
+                <a:solidFill>
+                  <a:schemeClr val="tx1"/>
+                </a:solidFill>
+                <a:effectLst/>
+                <a:latin typeface="+mn-lt"/>
+                <a:ea typeface="+mn-ea"/>
+                <a:cs typeface="+mn-cs"/>
+              </a:rPr>
+              <a:t> </a:t>
+            </a:r>
+            <a:r>
+              <a:rPr lang="en-GB" sz="1200" b="1" kern="1200" dirty="0">
+                <a:solidFill>
+                  <a:schemeClr val="tx1"/>
+                </a:solidFill>
+                <a:effectLst/>
+                <a:latin typeface="+mn-lt"/>
+                <a:ea typeface="+mn-ea"/>
+                <a:cs typeface="+mn-cs"/>
+              </a:rPr>
+              <a:t>579 K/mm²</a:t>
+            </a:r>
+            <a:r>
+              <a:rPr lang="en-GB" sz="1200" kern="1200" dirty="0">
+                <a:solidFill>
+                  <a:schemeClr val="tx1"/>
+                </a:solidFill>
+                <a:effectLst/>
+                <a:latin typeface="+mn-lt"/>
+                <a:ea typeface="+mn-ea"/>
+                <a:cs typeface="+mn-cs"/>
+              </a:rPr>
+              <a:t>.</a:t>
+            </a:r>
+          </a:p>
+          <a:p>
+            <a:pPr rtl="0"/>
+            <a:r>
+              <a:rPr lang="en-GB" sz="1200" b="1" kern="1200" dirty="0">
+                <a:solidFill>
+                  <a:schemeClr val="tx1"/>
+                </a:solidFill>
+                <a:effectLst/>
+                <a:latin typeface="+mn-lt"/>
+                <a:ea typeface="+mn-ea"/>
+                <a:cs typeface="+mn-cs"/>
+              </a:rPr>
+              <a:t>Importance:</a:t>
+            </a:r>
+            <a:r>
+              <a:rPr lang="en-GB" sz="1200" kern="1200" dirty="0">
+                <a:solidFill>
+                  <a:schemeClr val="tx1"/>
+                </a:solidFill>
+                <a:effectLst/>
+                <a:latin typeface="+mn-lt"/>
+                <a:ea typeface="+mn-ea"/>
+                <a:cs typeface="+mn-cs"/>
+              </a:rPr>
+              <a:t> This measures how crowded the clusters are on the flow cell. For a </a:t>
+            </a:r>
+            <a:r>
+              <a:rPr lang="en-GB" sz="1200" kern="1200" dirty="0" err="1">
+                <a:solidFill>
+                  <a:schemeClr val="tx1"/>
+                </a:solidFill>
+                <a:effectLst/>
+                <a:latin typeface="+mn-lt"/>
+                <a:ea typeface="+mn-ea"/>
+                <a:cs typeface="+mn-cs"/>
+              </a:rPr>
+              <a:t>MiSeq</a:t>
+            </a:r>
+            <a:r>
+              <a:rPr lang="en-GB" sz="1200" kern="1200" dirty="0">
+                <a:solidFill>
+                  <a:schemeClr val="tx1"/>
+                </a:solidFill>
+                <a:effectLst/>
+                <a:latin typeface="+mn-lt"/>
+                <a:ea typeface="+mn-ea"/>
+                <a:cs typeface="+mn-cs"/>
+              </a:rPr>
+              <a:t>, you typically want to see this between </a:t>
+            </a:r>
+            <a:r>
+              <a:rPr lang="en-GB" sz="1200" b="1" kern="1200" dirty="0">
+                <a:solidFill>
+                  <a:schemeClr val="tx1"/>
+                </a:solidFill>
+                <a:effectLst/>
+                <a:latin typeface="+mn-lt"/>
+                <a:ea typeface="+mn-ea"/>
+                <a:cs typeface="+mn-cs"/>
+              </a:rPr>
+              <a:t>800–1200 K/mm²</a:t>
+            </a:r>
+            <a:r>
+              <a:rPr lang="en-GB" sz="1200" kern="1200" dirty="0">
+                <a:solidFill>
+                  <a:schemeClr val="tx1"/>
+                </a:solidFill>
+                <a:effectLst/>
+                <a:latin typeface="+mn-lt"/>
+                <a:ea typeface="+mn-ea"/>
+                <a:cs typeface="+mn-cs"/>
+              </a:rPr>
+              <a:t> depending on the chemistry version. Your density is slightly low, which explains why your yields are in the 3.2 </a:t>
+            </a:r>
+            <a:r>
+              <a:rPr lang="en-GB" sz="1200" kern="1200" dirty="0" err="1">
+                <a:solidFill>
+                  <a:schemeClr val="tx1"/>
+                </a:solidFill>
+                <a:effectLst/>
+                <a:latin typeface="+mn-lt"/>
+                <a:ea typeface="+mn-ea"/>
+                <a:cs typeface="+mn-cs"/>
+              </a:rPr>
+              <a:t>Gbp</a:t>
+            </a:r>
+            <a:r>
+              <a:rPr lang="en-GB" sz="1200" kern="1200" dirty="0">
+                <a:solidFill>
+                  <a:schemeClr val="tx1"/>
+                </a:solidFill>
+                <a:effectLst/>
+                <a:latin typeface="+mn-lt"/>
+                <a:ea typeface="+mn-ea"/>
+                <a:cs typeface="+mn-cs"/>
+              </a:rPr>
+              <a:t> range rather than the maximum possible for the kit.</a:t>
+            </a:r>
+          </a:p>
+          <a:p>
+            <a:endParaRPr lang="en-GB" dirty="0"/>
+          </a:p>
+        </p:txBody>
+      </p:sp>
+      <p:sp>
+        <p:nvSpPr>
+          <p:cNvPr id="4" name="Slide Number Placeholder 3"/>
+          <p:cNvSpPr>
+            <a:spLocks noGrp="1"/>
+          </p:cNvSpPr>
+          <p:nvPr>
+            <p:ph type="sldNum" sz="quarter" idx="5"/>
+          </p:nvPr>
+        </p:nvSpPr>
+        <p:spPr/>
+        <p:txBody>
+          <a:bodyPr/>
+          <a:lstStyle/>
+          <a:p>
+            <a:fld id="{6A95CA27-854A-4F67-82E4-3167AB381797}" type="slidenum">
+              <a:rPr lang="en-GB" smtClean="0"/>
+              <a:t>2</a:t>
+            </a:fld>
+            <a:endParaRPr lang="en-GB"/>
+          </a:p>
+        </p:txBody>
+      </p:sp>
+    </p:spTree>
+    <p:extLst>
+      <p:ext uri="{BB962C8B-B14F-4D97-AF65-F5344CB8AC3E}">
+        <p14:creationId xmlns:p14="http://schemas.microsoft.com/office/powerpoint/2010/main" val="916192986"/>
+      </p:ext>
+    </p:extLst>
+  </p:cSld>
+  <p:clrMapOvr>
+    <a:masterClrMapping/>
+  </p:clrMapOvr>
+</p:notes>
 </file>
 
 <file path=ppt/slideLayouts/slideLayout1.xml><?xml version="1.0" encoding="utf-8"?>
@@ -350,7 +2027,7 @@
           <a:p>
             <a:fld id="{7520F557-9DD8-43CA-A044-14D31FD8E58E}" type="datetimeFigureOut">
               <a:rPr lang="en-GB" smtClean="0"/>
-              <a:t>05/04/2026</a:t>
+              <a:t>30/04/2026</a:t>
             </a:fld>
             <a:endParaRPr lang="en-GB"/>
           </a:p>
@@ -550,7 +2227,7 @@
           <a:p>
             <a:fld id="{7520F557-9DD8-43CA-A044-14D31FD8E58E}" type="datetimeFigureOut">
               <a:rPr lang="en-GB" smtClean="0"/>
-              <a:t>05/04/2026</a:t>
+              <a:t>30/04/2026</a:t>
             </a:fld>
             <a:endParaRPr lang="en-GB"/>
           </a:p>
@@ -760,7 +2437,7 @@
           <a:p>
             <a:fld id="{7520F557-9DD8-43CA-A044-14D31FD8E58E}" type="datetimeFigureOut">
               <a:rPr lang="en-GB" smtClean="0"/>
-              <a:t>05/04/2026</a:t>
+              <a:t>30/04/2026</a:t>
             </a:fld>
             <a:endParaRPr lang="en-GB"/>
           </a:p>
@@ -960,7 +2637,7 @@
           <a:p>
             <a:fld id="{7520F557-9DD8-43CA-A044-14D31FD8E58E}" type="datetimeFigureOut">
               <a:rPr lang="en-GB" smtClean="0"/>
-              <a:t>05/04/2026</a:t>
+              <a:t>30/04/2026</a:t>
             </a:fld>
             <a:endParaRPr lang="en-GB"/>
           </a:p>
@@ -1236,7 +2913,7 @@
           <a:p>
             <a:fld id="{7520F557-9DD8-43CA-A044-14D31FD8E58E}" type="datetimeFigureOut">
               <a:rPr lang="en-GB" smtClean="0"/>
-              <a:t>05/04/2026</a:t>
+              <a:t>30/04/2026</a:t>
             </a:fld>
             <a:endParaRPr lang="en-GB"/>
           </a:p>
@@ -1504,7 +3181,7 @@
           <a:p>
             <a:fld id="{7520F557-9DD8-43CA-A044-14D31FD8E58E}" type="datetimeFigureOut">
               <a:rPr lang="en-GB" smtClean="0"/>
-              <a:t>05/04/2026</a:t>
+              <a:t>30/04/2026</a:t>
             </a:fld>
             <a:endParaRPr lang="en-GB"/>
           </a:p>
@@ -1919,7 +3596,7 @@
           <a:p>
             <a:fld id="{7520F557-9DD8-43CA-A044-14D31FD8E58E}" type="datetimeFigureOut">
               <a:rPr lang="en-GB" smtClean="0"/>
-              <a:t>05/04/2026</a:t>
+              <a:t>30/04/2026</a:t>
             </a:fld>
             <a:endParaRPr lang="en-GB"/>
           </a:p>
@@ -2061,7 +3738,7 @@
           <a:p>
             <a:fld id="{7520F557-9DD8-43CA-A044-14D31FD8E58E}" type="datetimeFigureOut">
               <a:rPr lang="en-GB" smtClean="0"/>
-              <a:t>05/04/2026</a:t>
+              <a:t>30/04/2026</a:t>
             </a:fld>
             <a:endParaRPr lang="en-GB"/>
           </a:p>
@@ -2174,7 +3851,7 @@
           <a:p>
             <a:fld id="{7520F557-9DD8-43CA-A044-14D31FD8E58E}" type="datetimeFigureOut">
               <a:rPr lang="en-GB" smtClean="0"/>
-              <a:t>05/04/2026</a:t>
+              <a:t>30/04/2026</a:t>
             </a:fld>
             <a:endParaRPr lang="en-GB"/>
           </a:p>
@@ -2487,7 +4164,7 @@
           <a:p>
             <a:fld id="{7520F557-9DD8-43CA-A044-14D31FD8E58E}" type="datetimeFigureOut">
               <a:rPr lang="en-GB" smtClean="0"/>
-              <a:t>05/04/2026</a:t>
+              <a:t>30/04/2026</a:t>
             </a:fld>
             <a:endParaRPr lang="en-GB"/>
           </a:p>
@@ -2776,7 +4453,7 @@
           <a:p>
             <a:fld id="{7520F557-9DD8-43CA-A044-14D31FD8E58E}" type="datetimeFigureOut">
               <a:rPr lang="en-GB" smtClean="0"/>
-              <a:t>05/04/2026</a:t>
+              <a:t>30/04/2026</a:t>
             </a:fld>
             <a:endParaRPr lang="en-GB"/>
           </a:p>
@@ -3019,7 +4696,7 @@
           <a:p>
             <a:fld id="{7520F557-9DD8-43CA-A044-14D31FD8E58E}" type="datetimeFigureOut">
               <a:rPr lang="en-GB" smtClean="0"/>
-              <a:t>05/04/2026</a:t>
+              <a:t>30/04/2026</a:t>
             </a:fld>
             <a:endParaRPr lang="en-GB"/>
           </a:p>
@@ -3703,7 +5380,7 @@
           <p:nvPr/>
         </p:nvPicPr>
         <p:blipFill>
-          <a:blip r:embed="rId2"/>
+          <a:blip r:embed="rId3"/>
           <a:stretch>
             <a:fillRect/>
           </a:stretch>
@@ -5152,4 +6829,319 @@
     </a:ext>
   </a:extLst>
 </a:theme>
+</file>
+
+<file path=ppt/theme/theme2.xml><?xml version="1.0" encoding="utf-8"?>
+<a:theme xmlns:a="http://schemas.openxmlformats.org/drawingml/2006/main" name="Office Theme">
+  <a:themeElements>
+    <a:clrScheme name="Office">
+      <a:dk1>
+        <a:sysClr val="windowText" lastClr="000000"/>
+      </a:dk1>
+      <a:lt1>
+        <a:sysClr val="window" lastClr="FFFFFF"/>
+      </a:lt1>
+      <a:dk2>
+        <a:srgbClr val="0E2841"/>
+      </a:dk2>
+      <a:lt2>
+        <a:srgbClr val="E8E8E8"/>
+      </a:lt2>
+      <a:accent1>
+        <a:srgbClr val="156082"/>
+      </a:accent1>
+      <a:accent2>
+        <a:srgbClr val="E97132"/>
+      </a:accent2>
+      <a:accent3>
+        <a:srgbClr val="196B24"/>
+      </a:accent3>
+      <a:accent4>
+        <a:srgbClr val="0F9ED5"/>
+      </a:accent4>
+      <a:accent5>
+        <a:srgbClr val="A02B93"/>
+      </a:accent5>
+      <a:accent6>
+        <a:srgbClr val="4EA72E"/>
+      </a:accent6>
+      <a:hlink>
+        <a:srgbClr val="467886"/>
+      </a:hlink>
+      <a:folHlink>
+        <a:srgbClr val="96607D"/>
+      </a:folHlink>
+    </a:clrScheme>
+    <a:fontScheme name="Office">
+      <a:majorFont>
+        <a:latin typeface="Aptos Display" panose="02110004020202020204"/>
+        <a:ea typeface=""/>
+        <a:cs typeface=""/>
+        <a:font script="Jpan" typeface="游ゴシック Light"/>
+        <a:font script="Hang" typeface="맑은 고딕"/>
+        <a:font script="Hans" typeface="等线 Light"/>
+        <a:font script="Hant" typeface="新細明體"/>
+        <a:font script="Arab" typeface="Times New Roman"/>
+        <a:font script="Hebr" typeface="Times New Roman"/>
+        <a:font script="Thai" typeface="Angsana New"/>
+        <a:font script="Ethi" typeface="Nyala"/>
+        <a:font script="Beng" typeface="Vrinda"/>
+        <a:font script="Gujr" typeface="Shruti"/>
+        <a:font script="Khmr" typeface="MoolBoran"/>
+        <a:font script="Knda" typeface="Tunga"/>
+        <a:font script="Guru" typeface="Raavi"/>
+        <a:font script="Cans" typeface="Euphemia"/>
+        <a:font script="Cher" typeface="Plantagenet Cherokee"/>
+        <a:font script="Yiii" typeface="Microsoft Yi Baiti"/>
+        <a:font script="Tibt" typeface="Microsoft Himalaya"/>
+        <a:font script="Thaa" typeface="MV Boli"/>
+        <a:font script="Deva" typeface="Mangal"/>
+        <a:font script="Telu" typeface="Gautami"/>
+        <a:font script="Taml" typeface="Latha"/>
+        <a:font script="Syrc" typeface="Estrangelo Edessa"/>
+        <a:font script="Orya" typeface="Kalinga"/>
+        <a:font script="Mlym" typeface="Kartika"/>
+        <a:font script="Laoo" typeface="DokChampa"/>
+        <a:font script="Sinh" typeface="Iskoola Pota"/>
+        <a:font script="Mong" typeface="Mongolian Baiti"/>
+        <a:font script="Viet" typeface="Times New Roman"/>
+        <a:font script="Uigh" typeface="Microsoft Uighur"/>
+        <a:font script="Geor" typeface="Sylfaen"/>
+        <a:font script="Armn" typeface="Arial"/>
+        <a:font script="Bugi" typeface="Leelawadee UI"/>
+        <a:font script="Bopo" typeface="Microsoft JhengHei"/>
+        <a:font script="Java" typeface="Javanese Text"/>
+        <a:font script="Lisu" typeface="Segoe UI"/>
+        <a:font script="Mymr" typeface="Myanmar Text"/>
+        <a:font script="Nkoo" typeface="Ebrima"/>
+        <a:font script="Olck" typeface="Nirmala UI"/>
+        <a:font script="Osma" typeface="Ebrima"/>
+        <a:font script="Phag" typeface="Phagspa"/>
+        <a:font script="Syrn" typeface="Estrangelo Edessa"/>
+        <a:font script="Syrj" typeface="Estrangelo Edessa"/>
+        <a:font script="Syre" typeface="Estrangelo Edessa"/>
+        <a:font script="Sora" typeface="Nirmala UI"/>
+        <a:font script="Tale" typeface="Microsoft Tai Le"/>
+        <a:font script="Talu" typeface="Microsoft New Tai Lue"/>
+        <a:font script="Tfng" typeface="Ebrima"/>
+      </a:majorFont>
+      <a:minorFont>
+        <a:latin typeface="Aptos" panose="02110004020202020204"/>
+        <a:ea typeface=""/>
+        <a:cs typeface=""/>
+        <a:font script="Jpan" typeface="游ゴシック"/>
+        <a:font script="Hang" typeface="맑은 고딕"/>
+        <a:font script="Hans" typeface="等线"/>
+        <a:font script="Hant" typeface="新細明體"/>
+        <a:font script="Arab" typeface="Arial"/>
+        <a:font script="Hebr" typeface="Arial"/>
+        <a:font script="Thai" typeface="Cordia New"/>
+        <a:font script="Ethi" typeface="Nyala"/>
+        <a:font script="Beng" typeface="Vrinda"/>
+        <a:font script="Gujr" typeface="Shruti"/>
+        <a:font script="Khmr" typeface="DaunPenh"/>
+        <a:font script="Knda" typeface="Tunga"/>
+        <a:font script="Guru" typeface="Raavi"/>
+        <a:font script="Cans" typeface="Euphemia"/>
+        <a:font script="Cher" typeface="Plantagenet Cherokee"/>
+        <a:font script="Yiii" typeface="Microsoft Yi Baiti"/>
+        <a:font script="Tibt" typeface="Microsoft Himalaya"/>
+        <a:font script="Thaa" typeface="MV Boli"/>
+        <a:font script="Deva" typeface="Mangal"/>
+        <a:font script="Telu" typeface="Gautami"/>
+        <a:font script="Taml" typeface="Latha"/>
+        <a:font script="Syrc" typeface="Estrangelo Edessa"/>
+        <a:font script="Orya" typeface="Kalinga"/>
+        <a:font script="Mlym" typeface="Kartika"/>
+        <a:font script="Laoo" typeface="DokChampa"/>
+        <a:font script="Sinh" typeface="Iskoola Pota"/>
+        <a:font script="Mong" typeface="Mongolian Baiti"/>
+        <a:font script="Viet" typeface="Arial"/>
+        <a:font script="Uigh" typeface="Microsoft Uighur"/>
+        <a:font script="Geor" typeface="Sylfaen"/>
+        <a:font script="Armn" typeface="Arial"/>
+        <a:font script="Bugi" typeface="Leelawadee UI"/>
+        <a:font script="Bopo" typeface="Microsoft JhengHei"/>
+        <a:font script="Java" typeface="Javanese Text"/>
+        <a:font script="Lisu" typeface="Segoe UI"/>
+        <a:font script="Mymr" typeface="Myanmar Text"/>
+        <a:font script="Nkoo" typeface="Ebrima"/>
+        <a:font script="Olck" typeface="Nirmala UI"/>
+        <a:font script="Osma" typeface="Ebrima"/>
+        <a:font script="Phag" typeface="Phagspa"/>
+        <a:font script="Syrn" typeface="Estrangelo Edessa"/>
+        <a:font script="Syrj" typeface="Estrangelo Edessa"/>
+        <a:font script="Syre" typeface="Estrangelo Edessa"/>
+        <a:font script="Sora" typeface="Nirmala UI"/>
+        <a:font script="Tale" typeface="Microsoft Tai Le"/>
+        <a:font script="Talu" typeface="Microsoft New Tai Lue"/>
+        <a:font script="Tfng" typeface="Ebrima"/>
+      </a:minorFont>
+    </a:fontScheme>
+    <a:fmtScheme name="Office">
+      <a:fillStyleLst>
+        <a:solidFill>
+          <a:schemeClr val="phClr"/>
+        </a:solidFill>
+        <a:gradFill rotWithShape="1">
+          <a:gsLst>
+            <a:gs pos="0">
+              <a:schemeClr val="phClr">
+                <a:lumMod val="110000"/>
+                <a:satMod val="105000"/>
+                <a:tint val="67000"/>
+              </a:schemeClr>
+            </a:gs>
+            <a:gs pos="50000">
+              <a:schemeClr val="phClr">
+                <a:lumMod val="105000"/>
+                <a:satMod val="103000"/>
+                <a:tint val="73000"/>
+              </a:schemeClr>
+            </a:gs>
+            <a:gs pos="100000">
+              <a:schemeClr val="phClr">
+                <a:lumMod val="105000"/>
+                <a:satMod val="109000"/>
+                <a:tint val="81000"/>
+              </a:schemeClr>
+            </a:gs>
+          </a:gsLst>
+          <a:lin ang="5400000" scaled="0"/>
+        </a:gradFill>
+        <a:gradFill rotWithShape="1">
+          <a:gsLst>
+            <a:gs pos="0">
+              <a:schemeClr val="phClr">
+                <a:satMod val="103000"/>
+                <a:lumMod val="102000"/>
+                <a:tint val="94000"/>
+              </a:schemeClr>
+            </a:gs>
+            <a:gs pos="50000">
+              <a:schemeClr val="phClr">
+                <a:satMod val="110000"/>
+                <a:lumMod val="100000"/>
+                <a:shade val="100000"/>
+              </a:schemeClr>
+            </a:gs>
+            <a:gs pos="100000">
+              <a:schemeClr val="phClr">
+                <a:lumMod val="99000"/>
+                <a:satMod val="120000"/>
+                <a:shade val="78000"/>
+              </a:schemeClr>
+            </a:gs>
+          </a:gsLst>
+          <a:lin ang="5400000" scaled="0"/>
+        </a:gradFill>
+      </a:fillStyleLst>
+      <a:lnStyleLst>
+        <a:ln w="12700" cap="flat" cmpd="sng" algn="ctr">
+          <a:solidFill>
+            <a:schemeClr val="phClr"/>
+          </a:solidFill>
+          <a:prstDash val="solid"/>
+          <a:miter lim="800000"/>
+        </a:ln>
+        <a:ln w="19050" cap="flat" cmpd="sng" algn="ctr">
+          <a:solidFill>
+            <a:schemeClr val="phClr"/>
+          </a:solidFill>
+          <a:prstDash val="solid"/>
+          <a:miter lim="800000"/>
+        </a:ln>
+        <a:ln w="25400" cap="flat" cmpd="sng" algn="ctr">
+          <a:solidFill>
+            <a:schemeClr val="phClr"/>
+          </a:solidFill>
+          <a:prstDash val="solid"/>
+          <a:miter lim="800000"/>
+        </a:ln>
+      </a:lnStyleLst>
+      <a:effectStyleLst>
+        <a:effectStyle>
+          <a:effectLst/>
+        </a:effectStyle>
+        <a:effectStyle>
+          <a:effectLst/>
+        </a:effectStyle>
+        <a:effectStyle>
+          <a:effectLst>
+            <a:outerShdw blurRad="57150" dist="19050" dir="5400000" algn="ctr" rotWithShape="0">
+              <a:srgbClr val="000000">
+                <a:alpha val="63000"/>
+              </a:srgbClr>
+            </a:outerShdw>
+          </a:effectLst>
+        </a:effectStyle>
+      </a:effectStyleLst>
+      <a:bgFillStyleLst>
+        <a:solidFill>
+          <a:schemeClr val="phClr"/>
+        </a:solidFill>
+        <a:solidFill>
+          <a:schemeClr val="phClr">
+            <a:tint val="95000"/>
+            <a:satMod val="170000"/>
+          </a:schemeClr>
+        </a:solidFill>
+        <a:gradFill rotWithShape="1">
+          <a:gsLst>
+            <a:gs pos="0">
+              <a:schemeClr val="phClr">
+                <a:tint val="93000"/>
+                <a:satMod val="150000"/>
+                <a:shade val="98000"/>
+                <a:lumMod val="102000"/>
+              </a:schemeClr>
+            </a:gs>
+            <a:gs pos="50000">
+              <a:schemeClr val="phClr">
+                <a:tint val="98000"/>
+                <a:satMod val="130000"/>
+                <a:shade val="90000"/>
+                <a:lumMod val="103000"/>
+              </a:schemeClr>
+            </a:gs>
+            <a:gs pos="100000">
+              <a:schemeClr val="phClr">
+                <a:shade val="63000"/>
+                <a:satMod val="120000"/>
+              </a:schemeClr>
+            </a:gs>
+          </a:gsLst>
+          <a:lin ang="5400000" scaled="0"/>
+        </a:gradFill>
+      </a:bgFillStyleLst>
+    </a:fmtScheme>
+  </a:themeElements>
+  <a:objectDefaults>
+    <a:lnDef>
+      <a:spPr/>
+      <a:bodyPr/>
+      <a:lstStyle/>
+      <a:style>
+        <a:lnRef idx="2">
+          <a:schemeClr val="accent1"/>
+        </a:lnRef>
+        <a:fillRef idx="0">
+          <a:schemeClr val="accent1"/>
+        </a:fillRef>
+        <a:effectRef idx="1">
+          <a:schemeClr val="accent1"/>
+        </a:effectRef>
+        <a:fontRef idx="minor">
+          <a:schemeClr val="tx1"/>
+        </a:fontRef>
+      </a:style>
+    </a:lnDef>
+  </a:objectDefaults>
+  <a:extraClrSchemeLst/>
+  <a:extLst>
+    <a:ext uri="{05A4C25C-085E-4340-85A3-A5531E510DB2}">
+      <thm15:themeFamily xmlns:thm15="http://schemas.microsoft.com/office/thememl/2012/main" name="Office Theme" id="{2E142A2C-CD16-42D6-873A-C26D2A0506FA}" vid="{1BDDFF52-6CD6-40A5-AB3C-68EB2F1E4D0A}"/>
+    </a:ext>
+  </a:extLst>
+</a:theme>
 </file>
--- a/02_QC.pptx
+++ b/02_QC.pptx
@@ -5,7 +5,7 @@
     <p:sldMasterId id="2147483648" r:id="rId1"/>
   </p:sldMasterIdLst>
   <p:notesMasterIdLst>
-    <p:notesMasterId r:id="rId14"/>
+    <p:notesMasterId r:id="rId15"/>
   </p:notesMasterIdLst>
   <p:sldIdLst>
     <p:sldId id="256" r:id="rId2"/>
@@ -15,11 +15,12 @@
     <p:sldId id="259" r:id="rId6"/>
     <p:sldId id="261" r:id="rId7"/>
     <p:sldId id="260" r:id="rId8"/>
-    <p:sldId id="258" r:id="rId9"/>
-    <p:sldId id="262" r:id="rId10"/>
-    <p:sldId id="267" r:id="rId11"/>
-    <p:sldId id="265" r:id="rId12"/>
-    <p:sldId id="266" r:id="rId13"/>
+    <p:sldId id="268" r:id="rId9"/>
+    <p:sldId id="258" r:id="rId10"/>
+    <p:sldId id="262" r:id="rId11"/>
+    <p:sldId id="267" r:id="rId12"/>
+    <p:sldId id="265" r:id="rId13"/>
+    <p:sldId id="266" r:id="rId14"/>
   </p:sldIdLst>
   <p:sldSz cx="12192000" cy="6858000"/>
   <p:notesSz cx="6858000" cy="9144000"/>
@@ -150,12 +151,12 @@
   <pc:docChgLst>
     <pc:chgData name="Yassine Kasmi" userId="fdf8079a848cfec2" providerId="LiveId" clId="{A110CD56-9457-4CDC-B8D7-AAF74BDF5181}"/>
     <pc:docChg chg="addSld modSld">
-      <pc:chgData name="Yassine Kasmi" userId="fdf8079a848cfec2" providerId="LiveId" clId="{A110CD56-9457-4CDC-B8D7-AAF74BDF5181}" dt="2026-04-05T06:46:20.655" v="8" actId="478"/>
+      <pc:chgData name="Yassine Kasmi" userId="fdf8079a848cfec2" providerId="LiveId" clId="{A110CD56-9457-4CDC-B8D7-AAF74BDF5181}" dt="2026-05-04T15:22:46.273" v="10" actId="680"/>
       <pc:docMkLst>
         <pc:docMk/>
       </pc:docMkLst>
-      <pc:sldChg chg="addSp new mod">
-        <pc:chgData name="Yassine Kasmi" userId="fdf8079a848cfec2" providerId="LiveId" clId="{A110CD56-9457-4CDC-B8D7-AAF74BDF5181}" dt="2026-04-04T21:24:50.902" v="1" actId="22"/>
+      <pc:sldChg chg="addSp new mod modShow">
+        <pc:chgData name="Yassine Kasmi" userId="fdf8079a848cfec2" providerId="LiveId" clId="{A110CD56-9457-4CDC-B8D7-AAF74BDF5181}" dt="2026-05-04T14:16:08.220" v="9" actId="729"/>
         <pc:sldMkLst>
           <pc:docMk/>
           <pc:sldMk cId="870845586" sldId="265"/>
@@ -191,6 +192,13 @@
           </ac:picMkLst>
         </pc:picChg>
       </pc:sldChg>
+      <pc:sldChg chg="new">
+        <pc:chgData name="Yassine Kasmi" userId="fdf8079a848cfec2" providerId="LiveId" clId="{A110CD56-9457-4CDC-B8D7-AAF74BDF5181}" dt="2026-05-04T15:22:46.273" v="10" actId="680"/>
+        <pc:sldMkLst>
+          <pc:docMk/>
+          <pc:sldMk cId="3797019978" sldId="268"/>
+        </pc:sldMkLst>
+      </pc:sldChg>
     </pc:docChg>
   </pc:docChgLst>
 </pc:chgInfo>
@@ -278,7 +286,7 @@
           <a:p>
             <a:fld id="{938B22D5-4AEB-445F-9CE7-2E8954DA05E1}" type="datetimeFigureOut">
               <a:rPr lang="en-GB" smtClean="0"/>
-              <a:t>30/04/2026</a:t>
+              <a:t>04/05/2026</a:t>
             </a:fld>
             <a:endParaRPr lang="en-GB"/>
           </a:p>
@@ -2027,7 +2035,7 @@
           <a:p>
             <a:fld id="{7520F557-9DD8-43CA-A044-14D31FD8E58E}" type="datetimeFigureOut">
               <a:rPr lang="en-GB" smtClean="0"/>
-              <a:t>30/04/2026</a:t>
+              <a:t>04/05/2026</a:t>
             </a:fld>
             <a:endParaRPr lang="en-GB"/>
           </a:p>
@@ -2227,7 +2235,7 @@
           <a:p>
             <a:fld id="{7520F557-9DD8-43CA-A044-14D31FD8E58E}" type="datetimeFigureOut">
               <a:rPr lang="en-GB" smtClean="0"/>
-              <a:t>30/04/2026</a:t>
+              <a:t>04/05/2026</a:t>
             </a:fld>
             <a:endParaRPr lang="en-GB"/>
           </a:p>
@@ -2437,7 +2445,7 @@
           <a:p>
             <a:fld id="{7520F557-9DD8-43CA-A044-14D31FD8E58E}" type="datetimeFigureOut">
               <a:rPr lang="en-GB" smtClean="0"/>
-              <a:t>30/04/2026</a:t>
+              <a:t>04/05/2026</a:t>
             </a:fld>
             <a:endParaRPr lang="en-GB"/>
           </a:p>
@@ -2637,7 +2645,7 @@
           <a:p>
             <a:fld id="{7520F557-9DD8-43CA-A044-14D31FD8E58E}" type="datetimeFigureOut">
               <a:rPr lang="en-GB" smtClean="0"/>
-              <a:t>30/04/2026</a:t>
+              <a:t>04/05/2026</a:t>
             </a:fld>
             <a:endParaRPr lang="en-GB"/>
           </a:p>
@@ -2913,7 +2921,7 @@
           <a:p>
             <a:fld id="{7520F557-9DD8-43CA-A044-14D31FD8E58E}" type="datetimeFigureOut">
               <a:rPr lang="en-GB" smtClean="0"/>
-              <a:t>30/04/2026</a:t>
+              <a:t>04/05/2026</a:t>
             </a:fld>
             <a:endParaRPr lang="en-GB"/>
           </a:p>
@@ -3181,7 +3189,7 @@
           <a:p>
             <a:fld id="{7520F557-9DD8-43CA-A044-14D31FD8E58E}" type="datetimeFigureOut">
               <a:rPr lang="en-GB" smtClean="0"/>
-              <a:t>30/04/2026</a:t>
+              <a:t>04/05/2026</a:t>
             </a:fld>
             <a:endParaRPr lang="en-GB"/>
           </a:p>
@@ -3596,7 +3604,7 @@
           <a:p>
             <a:fld id="{7520F557-9DD8-43CA-A044-14D31FD8E58E}" type="datetimeFigureOut">
               <a:rPr lang="en-GB" smtClean="0"/>
-              <a:t>30/04/2026</a:t>
+              <a:t>04/05/2026</a:t>
             </a:fld>
             <a:endParaRPr lang="en-GB"/>
           </a:p>
@@ -3738,7 +3746,7 @@
           <a:p>
             <a:fld id="{7520F557-9DD8-43CA-A044-14D31FD8E58E}" type="datetimeFigureOut">
               <a:rPr lang="en-GB" smtClean="0"/>
-              <a:t>30/04/2026</a:t>
+              <a:t>04/05/2026</a:t>
             </a:fld>
             <a:endParaRPr lang="en-GB"/>
           </a:p>
@@ -3851,7 +3859,7 @@
           <a:p>
             <a:fld id="{7520F557-9DD8-43CA-A044-14D31FD8E58E}" type="datetimeFigureOut">
               <a:rPr lang="en-GB" smtClean="0"/>
-              <a:t>30/04/2026</a:t>
+              <a:t>04/05/2026</a:t>
             </a:fld>
             <a:endParaRPr lang="en-GB"/>
           </a:p>
@@ -4164,7 +4172,7 @@
           <a:p>
             <a:fld id="{7520F557-9DD8-43CA-A044-14D31FD8E58E}" type="datetimeFigureOut">
               <a:rPr lang="en-GB" smtClean="0"/>
-              <a:t>30/04/2026</a:t>
+              <a:t>04/05/2026</a:t>
             </a:fld>
             <a:endParaRPr lang="en-GB"/>
           </a:p>
@@ -4453,7 +4461,7 @@
           <a:p>
             <a:fld id="{7520F557-9DD8-43CA-A044-14D31FD8E58E}" type="datetimeFigureOut">
               <a:rPr lang="en-GB" smtClean="0"/>
-              <a:t>30/04/2026</a:t>
+              <a:t>04/05/2026</a:t>
             </a:fld>
             <a:endParaRPr lang="en-GB"/>
           </a:p>
@@ -4696,7 +4704,7 @@
           <a:p>
             <a:fld id="{7520F557-9DD8-43CA-A044-14D31FD8E58E}" type="datetimeFigureOut">
               <a:rPr lang="en-GB" smtClean="0"/>
-              <a:t>30/04/2026</a:t>
+              <a:t>04/05/2026</a:t>
             </a:fld>
             <a:endParaRPr lang="en-GB"/>
           </a:p>
@@ -5195,10 +5203,10 @@
       </p:grpSpPr>
       <p:pic>
         <p:nvPicPr>
-          <p:cNvPr id="1026" name="Picture 2">
-            <a:extLst>
-              <a:ext uri="{FF2B5EF4-FFF2-40B4-BE49-F238E27FC236}">
-                <a16:creationId xmlns:a16="http://schemas.microsoft.com/office/drawing/2014/main" id="{4D24AC17-CDC0-D8ED-FDA7-C1591D8CD264}"/>
+          <p:cNvPr id="3074" name="Picture 2" descr="Quality control: Assessing FASTQC results | Introduction to RNA-Seq using  high-performance computing - ARCHIVED">
+            <a:extLst>
+              <a:ext uri="{FF2B5EF4-FFF2-40B4-BE49-F238E27FC236}">
+                <a16:creationId xmlns:a16="http://schemas.microsoft.com/office/drawing/2014/main" id="{B6F05037-475F-1F58-C4DE-5E7E35731A25}"/>
               </a:ext>
             </a:extLst>
           </p:cNvPr>
@@ -5222,8 +5230,8 @@
         </p:blipFill>
         <p:spPr bwMode="auto">
           <a:xfrm>
-            <a:off x="2005013" y="319088"/>
-            <a:ext cx="8181975" cy="6219825"/>
+            <a:off x="2043113" y="338138"/>
+            <a:ext cx="8105775" cy="6181725"/>
           </a:xfrm>
           <a:prstGeom prst="rect">
             <a:avLst/>
@@ -5243,7 +5251,7 @@
     </p:spTree>
     <p:extLst>
       <p:ext uri="{BB962C8B-B14F-4D97-AF65-F5344CB8AC3E}">
-        <p14:creationId xmlns:p14="http://schemas.microsoft.com/office/powerpoint/2010/main" val="2501229363"/>
+        <p14:creationId xmlns:p14="http://schemas.microsoft.com/office/powerpoint/2010/main" val="1757675367"/>
       </p:ext>
     </p:extLst>
   </p:cSld>
@@ -5270,6 +5278,83 @@
           <a:chExt cx="0" cy="0"/>
         </a:xfrm>
       </p:grpSpPr>
+      <p:pic>
+        <p:nvPicPr>
+          <p:cNvPr id="1026" name="Picture 2">
+            <a:extLst>
+              <a:ext uri="{FF2B5EF4-FFF2-40B4-BE49-F238E27FC236}">
+                <a16:creationId xmlns:a16="http://schemas.microsoft.com/office/drawing/2014/main" id="{4D24AC17-CDC0-D8ED-FDA7-C1591D8CD264}"/>
+              </a:ext>
+            </a:extLst>
+          </p:cNvPr>
+          <p:cNvPicPr>
+            <a:picLocks noChangeAspect="1" noChangeArrowheads="1"/>
+          </p:cNvPicPr>
+          <p:nvPr/>
+        </p:nvPicPr>
+        <p:blipFill>
+          <a:blip r:embed="rId2">
+            <a:extLst>
+              <a:ext uri="{28A0092B-C50C-407E-A947-70E740481C1C}">
+                <a14:useLocalDpi xmlns:a14="http://schemas.microsoft.com/office/drawing/2010/main" val="0"/>
+              </a:ext>
+            </a:extLst>
+          </a:blip>
+          <a:srcRect/>
+          <a:stretch>
+            <a:fillRect/>
+          </a:stretch>
+        </p:blipFill>
+        <p:spPr bwMode="auto">
+          <a:xfrm>
+            <a:off x="2005013" y="319088"/>
+            <a:ext cx="8181975" cy="6219825"/>
+          </a:xfrm>
+          <a:prstGeom prst="rect">
+            <a:avLst/>
+          </a:prstGeom>
+          <a:noFill/>
+          <a:extLst>
+            <a:ext uri="{909E8E84-426E-40DD-AFC4-6F175D3DCCD1}">
+              <a14:hiddenFill xmlns:a14="http://schemas.microsoft.com/office/drawing/2010/main">
+                <a:solidFill>
+                  <a:srgbClr val="FFFFFF"/>
+                </a:solidFill>
+              </a14:hiddenFill>
+            </a:ext>
+          </a:extLst>
+        </p:spPr>
+      </p:pic>
+    </p:spTree>
+    <p:extLst>
+      <p:ext uri="{BB962C8B-B14F-4D97-AF65-F5344CB8AC3E}">
+        <p14:creationId xmlns:p14="http://schemas.microsoft.com/office/powerpoint/2010/main" val="2501229363"/>
+      </p:ext>
+    </p:extLst>
+  </p:cSld>
+  <p:clrMapOvr>
+    <a:masterClrMapping/>
+  </p:clrMapOvr>
+</p:sld>
+</file>
+
+<file path=ppt/slides/slide12.xml><?xml version="1.0" encoding="utf-8"?>
+<p:sld xmlns:a="http://schemas.openxmlformats.org/drawingml/2006/main" xmlns:r="http://schemas.openxmlformats.org/officeDocument/2006/relationships" xmlns:p="http://schemas.openxmlformats.org/presentationml/2006/main" show="0">
+  <p:cSld>
+    <p:spTree>
+      <p:nvGrpSpPr>
+        <p:cNvPr id="1" name=""/>
+        <p:cNvGrpSpPr/>
+        <p:nvPr/>
+      </p:nvGrpSpPr>
+      <p:grpSpPr>
+        <a:xfrm>
+          <a:off x="0" y="0"/>
+          <a:ext cx="0" cy="0"/>
+          <a:chOff x="0" y="0"/>
+          <a:chExt cx="0" cy="0"/>
+        </a:xfrm>
+      </p:grpSpPr>
       <p:sp>
         <p:nvSpPr>
           <p:cNvPr id="3" name="TextBox 2">
@@ -5318,7 +5403,7 @@
 </p:sld>
 </file>
 
-<file path=ppt/slides/slide12.xml><?xml version="1.0" encoding="utf-8"?>
+<file path=ppt/slides/slide13.xml><?xml version="1.0" encoding="utf-8"?>
 <p:sld xmlns:a="http://schemas.openxmlformats.org/drawingml/2006/main" xmlns:r="http://schemas.openxmlformats.org/officeDocument/2006/relationships" xmlns:p="http://schemas.openxmlformats.org/presentationml/2006/main">
   <p:cSld>
     <p:spTree>
@@ -6396,40 +6481,10 @@
           <a:chExt cx="0" cy="0"/>
         </a:xfrm>
       </p:grpSpPr>
-      <p:pic>
-        <p:nvPicPr>
-          <p:cNvPr id="3" name="Picture 2">
-            <a:extLst>
-              <a:ext uri="{FF2B5EF4-FFF2-40B4-BE49-F238E27FC236}">
-                <a16:creationId xmlns:a16="http://schemas.microsoft.com/office/drawing/2014/main" id="{67943D5E-468F-C6E7-1A6D-B03D775363A4}"/>
-              </a:ext>
-            </a:extLst>
-          </p:cNvPr>
-          <p:cNvPicPr>
-            <a:picLocks noChangeAspect="1"/>
-          </p:cNvPicPr>
-          <p:nvPr/>
-        </p:nvPicPr>
-        <p:blipFill>
-          <a:blip r:embed="rId2"/>
-          <a:stretch>
-            <a:fillRect/>
-          </a:stretch>
-        </p:blipFill>
-        <p:spPr>
-          <a:xfrm>
-            <a:off x="398576" y="679466"/>
-            <a:ext cx="11533397" cy="5711908"/>
-          </a:xfrm>
-          <a:prstGeom prst="rect">
-            <a:avLst/>
-          </a:prstGeom>
-        </p:spPr>
-      </p:pic>
     </p:spTree>
     <p:extLst>
       <p:ext uri="{BB962C8B-B14F-4D97-AF65-F5344CB8AC3E}">
-        <p14:creationId xmlns:p14="http://schemas.microsoft.com/office/powerpoint/2010/main" val="1674566125"/>
+        <p14:creationId xmlns:p14="http://schemas.microsoft.com/office/powerpoint/2010/main" val="3797019978"/>
       </p:ext>
     </p:extLst>
   </p:cSld>
@@ -6458,55 +6513,38 @@
       </p:grpSpPr>
       <p:pic>
         <p:nvPicPr>
-          <p:cNvPr id="3074" name="Picture 2" descr="Quality control: Assessing FASTQC results | Introduction to RNA-Seq using  high-performance computing - ARCHIVED">
-            <a:extLst>
-              <a:ext uri="{FF2B5EF4-FFF2-40B4-BE49-F238E27FC236}">
-                <a16:creationId xmlns:a16="http://schemas.microsoft.com/office/drawing/2014/main" id="{B6F05037-475F-1F58-C4DE-5E7E35731A25}"/>
+          <p:cNvPr id="3" name="Picture 2">
+            <a:extLst>
+              <a:ext uri="{FF2B5EF4-FFF2-40B4-BE49-F238E27FC236}">
+                <a16:creationId xmlns:a16="http://schemas.microsoft.com/office/drawing/2014/main" id="{67943D5E-468F-C6E7-1A6D-B03D775363A4}"/>
               </a:ext>
             </a:extLst>
           </p:cNvPr>
           <p:cNvPicPr>
-            <a:picLocks noChangeAspect="1" noChangeArrowheads="1"/>
+            <a:picLocks noChangeAspect="1"/>
           </p:cNvPicPr>
           <p:nvPr/>
         </p:nvPicPr>
         <p:blipFill>
-          <a:blip r:embed="rId2">
-            <a:extLst>
-              <a:ext uri="{28A0092B-C50C-407E-A947-70E740481C1C}">
-                <a14:useLocalDpi xmlns:a14="http://schemas.microsoft.com/office/drawing/2010/main" val="0"/>
-              </a:ext>
-            </a:extLst>
-          </a:blip>
-          <a:srcRect/>
+          <a:blip r:embed="rId2"/>
           <a:stretch>
             <a:fillRect/>
           </a:stretch>
         </p:blipFill>
-        <p:spPr bwMode="auto">
+        <p:spPr>
           <a:xfrm>
-            <a:off x="2043113" y="338138"/>
-            <a:ext cx="8105775" cy="6181725"/>
+            <a:off x="398576" y="679466"/>
+            <a:ext cx="11533397" cy="5711908"/>
           </a:xfrm>
           <a:prstGeom prst="rect">
             <a:avLst/>
           </a:prstGeom>
-          <a:noFill/>
-          <a:extLst>
-            <a:ext uri="{909E8E84-426E-40DD-AFC4-6F175D3DCCD1}">
-              <a14:hiddenFill xmlns:a14="http://schemas.microsoft.com/office/drawing/2010/main">
-                <a:solidFill>
-                  <a:srgbClr val="FFFFFF"/>
-                </a:solidFill>
-              </a14:hiddenFill>
-            </a:ext>
-          </a:extLst>
         </p:spPr>
       </p:pic>
     </p:spTree>
     <p:extLst>
       <p:ext uri="{BB962C8B-B14F-4D97-AF65-F5344CB8AC3E}">
-        <p14:creationId xmlns:p14="http://schemas.microsoft.com/office/powerpoint/2010/main" val="1757675367"/>
+        <p14:creationId xmlns:p14="http://schemas.microsoft.com/office/powerpoint/2010/main" val="1674566125"/>
       </p:ext>
     </p:extLst>
   </p:cSld>
